--- a/description/요구사항 명세서.pptx
+++ b/description/요구사항 명세서.pptx
@@ -5,14 +5,13 @@
     <p:sldMasterId id="2147483660" r:id="rId1"/>
   </p:sldMasterIdLst>
   <p:notesMasterIdLst>
-    <p:notesMasterId r:id="rId7"/>
+    <p:notesMasterId r:id="rId6"/>
   </p:notesMasterIdLst>
   <p:sldIdLst>
     <p:sldId id="295" r:id="rId2"/>
     <p:sldId id="326" r:id="rId3"/>
-    <p:sldId id="327" r:id="rId4"/>
-    <p:sldId id="328" r:id="rId5"/>
-    <p:sldId id="329" r:id="rId6"/>
+    <p:sldId id="330" r:id="rId4"/>
+    <p:sldId id="327" r:id="rId5"/>
   </p:sldIdLst>
   <p:sldSz cx="9144000" cy="6858000" type="screen4x3"/>
   <p:notesSz cx="6858000" cy="9144000"/>
@@ -905,7 +904,7 @@
     </p:spTree>
     <p:extLst>
       <p:ext uri="{BB962C8B-B14F-4D97-AF65-F5344CB8AC3E}">
-        <p14:creationId xmlns:p14="http://schemas.microsoft.com/office/powerpoint/2010/main" val="1380705820"/>
+        <p14:creationId xmlns:p14="http://schemas.microsoft.com/office/powerpoint/2010/main" val="3247220484"/>
       </p:ext>
     </p:extLst>
   </p:cSld>
@@ -1054,156 +1053,7 @@
     </p:spTree>
     <p:extLst>
       <p:ext uri="{BB962C8B-B14F-4D97-AF65-F5344CB8AC3E}">
-        <p14:creationId xmlns:p14="http://schemas.microsoft.com/office/powerpoint/2010/main" val="1606516936"/>
-      </p:ext>
-    </p:extLst>
-  </p:cSld>
-  <p:clrMapOvr>
-    <a:masterClrMapping/>
-  </p:clrMapOvr>
-</p:notes>
-</file>
-
-<file path=ppt/notesSlides/notesSlide5.xml><?xml version="1.0" encoding="utf-8"?>
-<p:notes xmlns:a="http://schemas.openxmlformats.org/drawingml/2006/main" xmlns:r="http://schemas.openxmlformats.org/officeDocument/2006/relationships" xmlns:p="http://schemas.openxmlformats.org/presentationml/2006/main">
-  <p:cSld>
-    <p:spTree>
-      <p:nvGrpSpPr>
-        <p:cNvPr id="1" name=""/>
-        <p:cNvGrpSpPr/>
-        <p:nvPr/>
-      </p:nvGrpSpPr>
-      <p:grpSpPr>
-        <a:xfrm>
-          <a:off x="0" y="0"/>
-          <a:ext cx="0" cy="0"/>
-          <a:chOff x="0" y="0"/>
-          <a:chExt cx="0" cy="0"/>
-        </a:xfrm>
-      </p:grpSpPr>
-      <p:sp>
-        <p:nvSpPr>
-          <p:cNvPr id="2" name="슬라이드 이미지 개체 틀 1"/>
-          <p:cNvSpPr>
-            <a:spLocks noGrp="1" noRot="1" noChangeAspect="1"/>
-          </p:cNvSpPr>
-          <p:nvPr>
-            <p:ph type="sldImg"/>
-          </p:nvPr>
-        </p:nvSpPr>
-        <p:spPr>
-          <a:xfrm>
-            <a:off x="1371600" y="1143000"/>
-            <a:ext cx="4114800" cy="3086100"/>
-          </a:xfrm>
-        </p:spPr>
-      </p:sp>
-      <p:sp>
-        <p:nvSpPr>
-          <p:cNvPr id="3" name="슬라이드 노트 개체 틀 2"/>
-          <p:cNvSpPr>
-            <a:spLocks noGrp="1"/>
-          </p:cNvSpPr>
-          <p:nvPr>
-            <p:ph type="body" idx="1"/>
-          </p:nvPr>
-        </p:nvSpPr>
-        <p:spPr/>
-        <p:txBody>
-          <a:bodyPr/>
-          <a:lstStyle/>
-          <a:p>
-            <a:endParaRPr kumimoji="1" lang="x-none" altLang="en-US" dirty="0"/>
-          </a:p>
-        </p:txBody>
-      </p:sp>
-      <p:sp>
-        <p:nvSpPr>
-          <p:cNvPr id="4" name="슬라이드 번호 개체 틀 3"/>
-          <p:cNvSpPr>
-            <a:spLocks noGrp="1"/>
-          </p:cNvSpPr>
-          <p:nvPr>
-            <p:ph type="sldNum" sz="quarter" idx="5"/>
-          </p:nvPr>
-        </p:nvSpPr>
-        <p:spPr/>
-        <p:txBody>
-          <a:bodyPr/>
-          <a:lstStyle/>
-          <a:p>
-            <a:pPr marL="0" marR="0" lvl="0" indent="0" algn="r" defTabSz="457200" rtl="0" eaLnBrk="1" fontAlgn="auto" latinLnBrk="0" hangingPunct="1">
-              <a:lnSpc>
-                <a:spcPct val="100000"/>
-              </a:lnSpc>
-              <a:spcBef>
-                <a:spcPts val="0"/>
-              </a:spcBef>
-              <a:spcAft>
-                <a:spcPts val="0"/>
-              </a:spcAft>
-              <a:buClrTx/>
-              <a:buSzTx/>
-              <a:buFontTx/>
-              <a:buNone/>
-              <a:tabLst/>
-              <a:defRPr/>
-            </a:pPr>
-            <a:fld id="{1EB96979-5F90-1E49-80BF-7D3DAEE95EFC}" type="slidenum">
-              <a:rPr kumimoji="1" lang="x-none" altLang="en-US" sz="1200" b="0" i="0" u="none" strike="noStrike" kern="1200" cap="none" spc="0" normalizeH="0" baseline="0" noProof="0" smtClean="0">
-                <a:ln>
-                  <a:noFill/>
-                </a:ln>
-                <a:solidFill>
-                  <a:prstClr val="black"/>
-                </a:solidFill>
-                <a:effectLst/>
-                <a:uLnTx/>
-                <a:uFillTx/>
-                <a:latin typeface="맑은 고딕" panose="02110004020202020204"/>
-                <a:ea typeface="+mn-ea"/>
-                <a:cs typeface="+mn-cs"/>
-              </a:rPr>
-              <a:pPr marL="0" marR="0" lvl="0" indent="0" algn="r" defTabSz="457200" rtl="0" eaLnBrk="1" fontAlgn="auto" latinLnBrk="0" hangingPunct="1">
-                <a:lnSpc>
-                  <a:spcPct val="100000"/>
-                </a:lnSpc>
-                <a:spcBef>
-                  <a:spcPts val="0"/>
-                </a:spcBef>
-                <a:spcAft>
-                  <a:spcPts val="0"/>
-                </a:spcAft>
-                <a:buClrTx/>
-                <a:buSzTx/>
-                <a:buFontTx/>
-                <a:buNone/>
-                <a:tabLst/>
-                <a:defRPr/>
-              </a:pPr>
-              <a:t>5</a:t>
-            </a:fld>
-            <a:endParaRPr kumimoji="1" lang="x-none" altLang="en-US" sz="1200" b="0" i="0" u="none" strike="noStrike" kern="1200" cap="none" spc="0" normalizeH="0" baseline="0" noProof="0">
-              <a:ln>
-                <a:noFill/>
-              </a:ln>
-              <a:solidFill>
-                <a:prstClr val="black"/>
-              </a:solidFill>
-              <a:effectLst/>
-              <a:uLnTx/>
-              <a:uFillTx/>
-              <a:latin typeface="맑은 고딕" panose="02110004020202020204"/>
-              <a:ea typeface="+mn-ea"/>
-              <a:cs typeface="+mn-cs"/>
-            </a:endParaRPr>
-          </a:p>
-        </p:txBody>
-      </p:sp>
-    </p:spTree>
-    <p:extLst>
-      <p:ext uri="{BB962C8B-B14F-4D97-AF65-F5344CB8AC3E}">
-        <p14:creationId xmlns:p14="http://schemas.microsoft.com/office/powerpoint/2010/main" val="202778960"/>
+        <p14:creationId xmlns:p14="http://schemas.microsoft.com/office/powerpoint/2010/main" val="1380705820"/>
       </p:ext>
     </p:extLst>
   </p:cSld>
@@ -16602,6 +16452,1542 @@
         </p:nvSpPr>
         <p:spPr>
           <a:xfrm>
+            <a:off x="438663" y="1316954"/>
+            <a:ext cx="4000534" cy="301173"/>
+          </a:xfrm>
+          <a:prstGeom prst="rect">
+            <a:avLst/>
+          </a:prstGeom>
+          <a:noFill/>
+        </p:spPr>
+        <p:txBody>
+          <a:bodyPr wrap="square" rtlCol="0">
+            <a:spAutoFit/>
+          </a:bodyPr>
+          <a:lstStyle/>
+          <a:p>
+            <a:pPr marL="143996" lvl="1" indent="-143996">
+              <a:lnSpc>
+                <a:spcPct val="120000"/>
+              </a:lnSpc>
+              <a:spcBef>
+                <a:spcPts val="600"/>
+              </a:spcBef>
+              <a:spcAft>
+                <a:spcPts val="400"/>
+              </a:spcAft>
+              <a:buFont typeface="Wingdings" panose="05000000000000000000" pitchFamily="2" charset="2"/>
+              <a:buChar char="§"/>
+              <a:defRPr/>
+            </a:pPr>
+            <a:r>
+              <a:rPr lang="en-US" altLang="ko-KR" sz="1200" dirty="0">
+                <a:solidFill>
+                  <a:prstClr val="black"/>
+                </a:solidFill>
+                <a:ea typeface="나눔스퀘어 네오 OTF Bold"/>
+              </a:rPr>
+              <a:t>TRANS_001 </a:t>
+            </a:r>
+            <a:r>
+              <a:rPr lang="ko-KR" altLang="en-US" sz="1200" dirty="0">
+                <a:solidFill>
+                  <a:prstClr val="black"/>
+                </a:solidFill>
+                <a:ea typeface="나눔스퀘어 네오 OTF Bold"/>
+              </a:rPr>
+              <a:t>토지 구매</a:t>
+            </a:r>
+            <a:r>
+              <a:rPr lang="en-US" altLang="ko-KR" sz="1200" dirty="0">
+                <a:solidFill>
+                  <a:prstClr val="black"/>
+                </a:solidFill>
+                <a:ea typeface="나눔스퀘어 네오 OTF Bold"/>
+              </a:rPr>
+              <a:t>, TRANS_002 </a:t>
+            </a:r>
+            <a:r>
+              <a:rPr lang="ko-KR" altLang="en-US" sz="1200" dirty="0">
+                <a:solidFill>
+                  <a:prstClr val="black"/>
+                </a:solidFill>
+                <a:ea typeface="나눔스퀘어 네오 OTF Bold"/>
+              </a:rPr>
+              <a:t>통행료 지불</a:t>
+            </a:r>
+            <a:endParaRPr lang="en-US" altLang="ko-KR" sz="1200" dirty="0">
+              <a:solidFill>
+                <a:prstClr val="black"/>
+              </a:solidFill>
+              <a:ea typeface="나눔스퀘어 네오 OTF Bold"/>
+            </a:endParaRPr>
+          </a:p>
+        </p:txBody>
+      </p:sp>
+      <p:sp>
+        <p:nvSpPr>
+          <p:cNvPr id="13" name="TextBox 12">
+            <a:extLst>
+              <a:ext uri="{FF2B5EF4-FFF2-40B4-BE49-F238E27FC236}">
+                <a16:creationId xmlns:a16="http://schemas.microsoft.com/office/drawing/2014/main" id="{7620B1D1-88C8-C3A1-A6AC-FB40657DA5CC}"/>
+              </a:ext>
+            </a:extLst>
+          </p:cNvPr>
+          <p:cNvSpPr txBox="1">
+            <a:spLocks noChangeAspect="1"/>
+          </p:cNvSpPr>
+          <p:nvPr/>
+        </p:nvSpPr>
+        <p:spPr>
+          <a:xfrm>
+            <a:off x="438664" y="912969"/>
+            <a:ext cx="1154483" cy="338554"/>
+          </a:xfrm>
+          <a:prstGeom prst="rect">
+            <a:avLst/>
+          </a:prstGeom>
+          <a:noFill/>
+          <a:ln>
+            <a:noFill/>
+          </a:ln>
+        </p:spPr>
+        <p:txBody>
+          <a:bodyPr wrap="none" rtlCol="0" anchor="ctr">
+            <a:spAutoFit/>
+          </a:bodyPr>
+          <a:lstStyle/>
+          <a:p>
+            <a:pPr defTabSz="457189" latinLnBrk="0"/>
+            <a:r>
+              <a:rPr lang="ko-KR" altLang="en-US" sz="1600" b="1" dirty="0" err="1">
+                <a:solidFill>
+                  <a:srgbClr val="002878"/>
+                </a:solidFill>
+                <a:latin typeface="나눔스퀘어 네오 OTF ExtraBold" panose="00000900000000000000" pitchFamily="50" charset="-127"/>
+                <a:ea typeface="나눔스퀘어 네오 OTF ExtraBold" panose="00000900000000000000" pitchFamily="50" charset="-127"/>
+              </a:rPr>
+              <a:t>플로우차트</a:t>
+            </a:r>
+            <a:endParaRPr lang="ko-KR" altLang="en-US" sz="1600" dirty="0">
+              <a:solidFill>
+                <a:srgbClr val="002060"/>
+              </a:solidFill>
+              <a:latin typeface="나눔스퀘어 네오 OTF ExtraBold" panose="00000900000000000000" pitchFamily="50" charset="-127"/>
+              <a:ea typeface="나눔스퀘어 네오 OTF ExtraBold" panose="00000900000000000000" pitchFamily="50" charset="-127"/>
+            </a:endParaRPr>
+          </a:p>
+        </p:txBody>
+      </p:sp>
+      <p:sp>
+        <p:nvSpPr>
+          <p:cNvPr id="15" name="직사각형 14">
+            <a:extLst>
+              <a:ext uri="{FF2B5EF4-FFF2-40B4-BE49-F238E27FC236}">
+                <a16:creationId xmlns:a16="http://schemas.microsoft.com/office/drawing/2014/main" id="{9449BDB6-062E-2CE3-F757-47E16E9475DE}"/>
+              </a:ext>
+            </a:extLst>
+          </p:cNvPr>
+          <p:cNvSpPr/>
+          <p:nvPr/>
+        </p:nvSpPr>
+        <p:spPr>
+          <a:xfrm>
+            <a:off x="396695" y="983247"/>
+            <a:ext cx="45719" cy="198000"/>
+          </a:xfrm>
+          <a:prstGeom prst="rect">
+            <a:avLst/>
+          </a:prstGeom>
+          <a:solidFill>
+            <a:schemeClr val="tx2"/>
+          </a:solidFill>
+          <a:ln>
+            <a:noFill/>
+          </a:ln>
+        </p:spPr>
+        <p:style>
+          <a:lnRef idx="2">
+            <a:schemeClr val="accent1">
+              <a:shade val="50000"/>
+            </a:schemeClr>
+          </a:lnRef>
+          <a:fillRef idx="1">
+            <a:schemeClr val="accent1"/>
+          </a:fillRef>
+          <a:effectRef idx="0">
+            <a:schemeClr val="accent1"/>
+          </a:effectRef>
+          <a:fontRef idx="minor">
+            <a:schemeClr val="lt1"/>
+          </a:fontRef>
+        </p:style>
+        <p:txBody>
+          <a:bodyPr rtlCol="0" anchor="ctr"/>
+          <a:lstStyle/>
+          <a:p>
+            <a:pPr algn="ctr" defTabSz="457189" latinLnBrk="0"/>
+            <a:endParaRPr lang="ko-KR" altLang="en-US" dirty="0">
+              <a:solidFill>
+                <a:prstClr val="black"/>
+              </a:solidFill>
+              <a:latin typeface="나눔스퀘어 네오 OTF Regular" panose="00000500000000000000" pitchFamily="50" charset="-127"/>
+              <a:ea typeface="나눔스퀘어 네오 OTF Regular" panose="00000500000000000000" pitchFamily="50" charset="-127"/>
+            </a:endParaRPr>
+          </a:p>
+        </p:txBody>
+      </p:sp>
+      <p:sp>
+        <p:nvSpPr>
+          <p:cNvPr id="4" name="순서도: 수행의 시작/종료 3">
+            <a:extLst>
+              <a:ext uri="{FF2B5EF4-FFF2-40B4-BE49-F238E27FC236}">
+                <a16:creationId xmlns:a16="http://schemas.microsoft.com/office/drawing/2014/main" id="{3405CDEF-55B6-4386-8894-BC650263D105}"/>
+              </a:ext>
+            </a:extLst>
+          </p:cNvPr>
+          <p:cNvSpPr/>
+          <p:nvPr/>
+        </p:nvSpPr>
+        <p:spPr>
+          <a:xfrm>
+            <a:off x="273352" y="3429000"/>
+            <a:ext cx="1375954" cy="687977"/>
+          </a:xfrm>
+          <a:prstGeom prst="flowChartTerminator">
+            <a:avLst/>
+          </a:prstGeom>
+          <a:solidFill>
+            <a:schemeClr val="accent1">
+              <a:lumMod val="50000"/>
+              <a:alpha val="50000"/>
+            </a:schemeClr>
+          </a:solidFill>
+          <a:ln>
+            <a:noFill/>
+          </a:ln>
+        </p:spPr>
+        <p:style>
+          <a:lnRef idx="0">
+            <a:scrgbClr r="0" g="0" b="0"/>
+          </a:lnRef>
+          <a:fillRef idx="0">
+            <a:scrgbClr r="0" g="0" b="0"/>
+          </a:fillRef>
+          <a:effectRef idx="0">
+            <a:scrgbClr r="0" g="0" b="0"/>
+          </a:effectRef>
+          <a:fontRef idx="minor">
+            <a:schemeClr val="lt1"/>
+          </a:fontRef>
+        </p:style>
+        <p:txBody>
+          <a:bodyPr rtlCol="0" anchor="ctr"/>
+          <a:lstStyle/>
+          <a:p>
+            <a:pPr algn="ctr"/>
+            <a:r>
+              <a:rPr lang="ko-KR" altLang="en-US" sz="1100" dirty="0">
+                <a:latin typeface="나눔스퀘어 네오 OTF Regular" panose="00000500000000000000" pitchFamily="50" charset="-127"/>
+                <a:ea typeface="나눔스퀘어 네오 OTF Regular" panose="00000500000000000000" pitchFamily="50" charset="-127"/>
+              </a:rPr>
+              <a:t>플레이어 턴 시작</a:t>
+            </a:r>
+          </a:p>
+        </p:txBody>
+      </p:sp>
+      <p:sp>
+        <p:nvSpPr>
+          <p:cNvPr id="6" name="순서도: 판단 5">
+            <a:extLst>
+              <a:ext uri="{FF2B5EF4-FFF2-40B4-BE49-F238E27FC236}">
+                <a16:creationId xmlns:a16="http://schemas.microsoft.com/office/drawing/2014/main" id="{F86CF493-B106-4D0E-92E9-131688C9916B}"/>
+              </a:ext>
+            </a:extLst>
+          </p:cNvPr>
+          <p:cNvSpPr/>
+          <p:nvPr/>
+        </p:nvSpPr>
+        <p:spPr>
+          <a:xfrm>
+            <a:off x="3500845" y="3354250"/>
+            <a:ext cx="1375954" cy="837475"/>
+          </a:xfrm>
+          <a:prstGeom prst="flowChartDecision">
+            <a:avLst/>
+          </a:prstGeom>
+          <a:solidFill>
+            <a:schemeClr val="accent1">
+              <a:lumMod val="50000"/>
+              <a:alpha val="50000"/>
+            </a:schemeClr>
+          </a:solidFill>
+          <a:ln>
+            <a:noFill/>
+          </a:ln>
+        </p:spPr>
+        <p:style>
+          <a:lnRef idx="0">
+            <a:scrgbClr r="0" g="0" b="0"/>
+          </a:lnRef>
+          <a:fillRef idx="0">
+            <a:scrgbClr r="0" g="0" b="0"/>
+          </a:fillRef>
+          <a:effectRef idx="0">
+            <a:scrgbClr r="0" g="0" b="0"/>
+          </a:effectRef>
+          <a:fontRef idx="minor">
+            <a:schemeClr val="lt1"/>
+          </a:fontRef>
+        </p:style>
+        <p:txBody>
+          <a:bodyPr rtlCol="0" anchor="ctr"/>
+          <a:lstStyle/>
+          <a:p>
+            <a:pPr algn="ctr"/>
+            <a:r>
+              <a:rPr lang="ko-KR" altLang="en-US" sz="1100" dirty="0">
+                <a:latin typeface="나눔스퀘어 네오 OTF Regular" panose="00000500000000000000" pitchFamily="50" charset="-127"/>
+                <a:ea typeface="나눔스퀘어 네오 OTF Regular" panose="00000500000000000000" pitchFamily="50" charset="-127"/>
+              </a:rPr>
+              <a:t>타일의 종류</a:t>
+            </a:r>
+          </a:p>
+        </p:txBody>
+      </p:sp>
+      <p:sp>
+        <p:nvSpPr>
+          <p:cNvPr id="8" name="순서도: 처리 7">
+            <a:extLst>
+              <a:ext uri="{FF2B5EF4-FFF2-40B4-BE49-F238E27FC236}">
+                <a16:creationId xmlns:a16="http://schemas.microsoft.com/office/drawing/2014/main" id="{8E13B754-41CC-474B-A6CC-AD9B9A7F92C2}"/>
+              </a:ext>
+            </a:extLst>
+          </p:cNvPr>
+          <p:cNvSpPr/>
+          <p:nvPr/>
+        </p:nvSpPr>
+        <p:spPr>
+          <a:xfrm>
+            <a:off x="2052561" y="3429000"/>
+            <a:ext cx="1045029" cy="687977"/>
+          </a:xfrm>
+          <a:prstGeom prst="flowChartProcess">
+            <a:avLst/>
+          </a:prstGeom>
+          <a:solidFill>
+            <a:schemeClr val="accent1">
+              <a:lumMod val="50000"/>
+              <a:alpha val="50000"/>
+            </a:schemeClr>
+          </a:solidFill>
+          <a:ln>
+            <a:noFill/>
+          </a:ln>
+        </p:spPr>
+        <p:style>
+          <a:lnRef idx="0">
+            <a:scrgbClr r="0" g="0" b="0"/>
+          </a:lnRef>
+          <a:fillRef idx="0">
+            <a:scrgbClr r="0" g="0" b="0"/>
+          </a:fillRef>
+          <a:effectRef idx="0">
+            <a:scrgbClr r="0" g="0" b="0"/>
+          </a:effectRef>
+          <a:fontRef idx="minor">
+            <a:schemeClr val="lt1"/>
+          </a:fontRef>
+        </p:style>
+        <p:txBody>
+          <a:bodyPr rtlCol="0" anchor="ctr"/>
+          <a:lstStyle/>
+          <a:p>
+            <a:pPr algn="ctr"/>
+            <a:r>
+              <a:rPr lang="ko-KR" altLang="en-US" sz="1100" dirty="0">
+                <a:latin typeface="나눔스퀘어 네오 OTF Regular" panose="00000500000000000000" pitchFamily="50" charset="-127"/>
+                <a:ea typeface="나눔스퀘어 네오 OTF Regular" panose="00000500000000000000" pitchFamily="50" charset="-127"/>
+              </a:rPr>
+              <a:t>주사위 던지기</a:t>
+            </a:r>
+          </a:p>
+        </p:txBody>
+      </p:sp>
+      <p:sp>
+        <p:nvSpPr>
+          <p:cNvPr id="17" name="순서도: 판단 16">
+            <a:extLst>
+              <a:ext uri="{FF2B5EF4-FFF2-40B4-BE49-F238E27FC236}">
+                <a16:creationId xmlns:a16="http://schemas.microsoft.com/office/drawing/2014/main" id="{0D2EF3BE-2D1B-4443-A50F-8FC8087C801E}"/>
+              </a:ext>
+            </a:extLst>
+          </p:cNvPr>
+          <p:cNvSpPr/>
+          <p:nvPr/>
+        </p:nvSpPr>
+        <p:spPr>
+          <a:xfrm>
+            <a:off x="4783480" y="1956356"/>
+            <a:ext cx="1375954" cy="837475"/>
+          </a:xfrm>
+          <a:prstGeom prst="flowChartDecision">
+            <a:avLst/>
+          </a:prstGeom>
+          <a:solidFill>
+            <a:schemeClr val="accent1">
+              <a:lumMod val="50000"/>
+              <a:alpha val="50000"/>
+            </a:schemeClr>
+          </a:solidFill>
+          <a:ln>
+            <a:noFill/>
+          </a:ln>
+        </p:spPr>
+        <p:style>
+          <a:lnRef idx="0">
+            <a:scrgbClr r="0" g="0" b="0"/>
+          </a:lnRef>
+          <a:fillRef idx="0">
+            <a:scrgbClr r="0" g="0" b="0"/>
+          </a:fillRef>
+          <a:effectRef idx="0">
+            <a:scrgbClr r="0" g="0" b="0"/>
+          </a:effectRef>
+          <a:fontRef idx="minor">
+            <a:schemeClr val="lt1"/>
+          </a:fontRef>
+        </p:style>
+        <p:txBody>
+          <a:bodyPr rtlCol="0" anchor="ctr"/>
+          <a:lstStyle/>
+          <a:p>
+            <a:pPr algn="ctr"/>
+            <a:r>
+              <a:rPr lang="ko-KR" altLang="en-US" sz="1100" dirty="0">
+                <a:latin typeface="나눔스퀘어 네오 OTF Regular" panose="00000500000000000000" pitchFamily="50" charset="-127"/>
+                <a:ea typeface="나눔스퀘어 네오 OTF Regular" panose="00000500000000000000" pitchFamily="50" charset="-127"/>
+              </a:rPr>
+              <a:t>소유권</a:t>
+            </a:r>
+            <a:endParaRPr lang="en-US" altLang="ko-KR" sz="1100" dirty="0">
+              <a:latin typeface="나눔스퀘어 네오 OTF Regular" panose="00000500000000000000" pitchFamily="50" charset="-127"/>
+              <a:ea typeface="나눔스퀘어 네오 OTF Regular" panose="00000500000000000000" pitchFamily="50" charset="-127"/>
+            </a:endParaRPr>
+          </a:p>
+          <a:p>
+            <a:pPr algn="ctr"/>
+            <a:r>
+              <a:rPr lang="ko-KR" altLang="en-US" sz="1100" dirty="0">
+                <a:latin typeface="나눔스퀘어 네오 OTF Regular" panose="00000500000000000000" pitchFamily="50" charset="-127"/>
+                <a:ea typeface="나눔스퀘어 네오 OTF Regular" panose="00000500000000000000" pitchFamily="50" charset="-127"/>
+              </a:rPr>
+              <a:t>유무</a:t>
+            </a:r>
+          </a:p>
+        </p:txBody>
+      </p:sp>
+      <p:sp>
+        <p:nvSpPr>
+          <p:cNvPr id="18" name="순서도: 판단 17">
+            <a:extLst>
+              <a:ext uri="{FF2B5EF4-FFF2-40B4-BE49-F238E27FC236}">
+                <a16:creationId xmlns:a16="http://schemas.microsoft.com/office/drawing/2014/main" id="{89B6B390-6071-4976-8B28-71C94723B895}"/>
+              </a:ext>
+            </a:extLst>
+          </p:cNvPr>
+          <p:cNvSpPr/>
+          <p:nvPr/>
+        </p:nvSpPr>
+        <p:spPr>
+          <a:xfrm>
+            <a:off x="4783480" y="4761976"/>
+            <a:ext cx="1375954" cy="837475"/>
+          </a:xfrm>
+          <a:prstGeom prst="flowChartDecision">
+            <a:avLst/>
+          </a:prstGeom>
+          <a:solidFill>
+            <a:schemeClr val="accent1">
+              <a:lumMod val="50000"/>
+              <a:alpha val="50000"/>
+            </a:schemeClr>
+          </a:solidFill>
+          <a:ln>
+            <a:noFill/>
+          </a:ln>
+        </p:spPr>
+        <p:style>
+          <a:lnRef idx="0">
+            <a:scrgbClr r="0" g="0" b="0"/>
+          </a:lnRef>
+          <a:fillRef idx="0">
+            <a:scrgbClr r="0" g="0" b="0"/>
+          </a:fillRef>
+          <a:effectRef idx="0">
+            <a:scrgbClr r="0" g="0" b="0"/>
+          </a:effectRef>
+          <a:fontRef idx="minor">
+            <a:schemeClr val="lt1"/>
+          </a:fontRef>
+        </p:style>
+        <p:txBody>
+          <a:bodyPr rtlCol="0" anchor="ctr"/>
+          <a:lstStyle/>
+          <a:p>
+            <a:pPr algn="ctr"/>
+            <a:r>
+              <a:rPr lang="ko-KR" altLang="en-US" sz="1100" dirty="0">
+                <a:latin typeface="나눔스퀘어 네오 OTF Regular" panose="00000500000000000000" pitchFamily="50" charset="-127"/>
+                <a:ea typeface="나눔스퀘어 네오 OTF Regular" panose="00000500000000000000" pitchFamily="50" charset="-127"/>
+              </a:rPr>
+              <a:t>이벤트</a:t>
+            </a:r>
+            <a:endParaRPr lang="en-US" altLang="ko-KR" sz="1100" dirty="0">
+              <a:latin typeface="나눔스퀘어 네오 OTF Regular" panose="00000500000000000000" pitchFamily="50" charset="-127"/>
+              <a:ea typeface="나눔스퀘어 네오 OTF Regular" panose="00000500000000000000" pitchFamily="50" charset="-127"/>
+            </a:endParaRPr>
+          </a:p>
+          <a:p>
+            <a:pPr algn="ctr"/>
+            <a:r>
+              <a:rPr lang="ko-KR" altLang="en-US" sz="1100" dirty="0">
+                <a:latin typeface="나눔스퀘어 네오 OTF Regular" panose="00000500000000000000" pitchFamily="50" charset="-127"/>
+                <a:ea typeface="나눔스퀘어 네오 OTF Regular" panose="00000500000000000000" pitchFamily="50" charset="-127"/>
+              </a:rPr>
+              <a:t>종류</a:t>
+            </a:r>
+          </a:p>
+        </p:txBody>
+      </p:sp>
+      <p:sp>
+        <p:nvSpPr>
+          <p:cNvPr id="24" name="TextBox 23">
+            <a:extLst>
+              <a:ext uri="{FF2B5EF4-FFF2-40B4-BE49-F238E27FC236}">
+                <a16:creationId xmlns:a16="http://schemas.microsoft.com/office/drawing/2014/main" id="{5A5A1A7D-7CEF-4CD6-9ABF-5CD17A289CF4}"/>
+              </a:ext>
+            </a:extLst>
+          </p:cNvPr>
+          <p:cNvSpPr txBox="1"/>
+          <p:nvPr/>
+        </p:nvSpPr>
+        <p:spPr>
+          <a:xfrm>
+            <a:off x="3989862" y="2765397"/>
+            <a:ext cx="756819" cy="283732"/>
+          </a:xfrm>
+          <a:prstGeom prst="rect">
+            <a:avLst/>
+          </a:prstGeom>
+          <a:noFill/>
+        </p:spPr>
+        <p:txBody>
+          <a:bodyPr wrap="square" rtlCol="0">
+            <a:spAutoFit/>
+          </a:bodyPr>
+          <a:lstStyle/>
+          <a:p>
+            <a:pPr algn="ctr">
+              <a:lnSpc>
+                <a:spcPct val="120000"/>
+              </a:lnSpc>
+              <a:spcAft>
+                <a:spcPts val="600"/>
+              </a:spcAft>
+            </a:pPr>
+            <a:r>
+              <a:rPr lang="ko-KR" altLang="en-US" sz="1100" dirty="0">
+                <a:latin typeface="나눔스퀘어 네오 OTF Regular" panose="00000500000000000000" pitchFamily="50" charset="-127"/>
+                <a:ea typeface="나눔스퀘어 네오 OTF Regular" panose="00000500000000000000" pitchFamily="50" charset="-127"/>
+              </a:rPr>
+              <a:t>토지 타일</a:t>
+            </a:r>
+            <a:endParaRPr lang="en-US" altLang="ko-KR" sz="1100" dirty="0">
+              <a:latin typeface="나눔스퀘어 네오 OTF Regular" panose="00000500000000000000" pitchFamily="50" charset="-127"/>
+              <a:ea typeface="나눔스퀘어 네오 OTF Regular" panose="00000500000000000000" pitchFamily="50" charset="-127"/>
+            </a:endParaRPr>
+          </a:p>
+        </p:txBody>
+      </p:sp>
+      <p:sp>
+        <p:nvSpPr>
+          <p:cNvPr id="25" name="TextBox 24">
+            <a:extLst>
+              <a:ext uri="{FF2B5EF4-FFF2-40B4-BE49-F238E27FC236}">
+                <a16:creationId xmlns:a16="http://schemas.microsoft.com/office/drawing/2014/main" id="{CAB4A020-AFEE-4C0C-9CA8-AAB49BDF72DC}"/>
+              </a:ext>
+            </a:extLst>
+          </p:cNvPr>
+          <p:cNvSpPr txBox="1"/>
+          <p:nvPr/>
+        </p:nvSpPr>
+        <p:spPr>
+          <a:xfrm>
+            <a:off x="3798167" y="4447892"/>
+            <a:ext cx="888234" cy="283732"/>
+          </a:xfrm>
+          <a:prstGeom prst="rect">
+            <a:avLst/>
+          </a:prstGeom>
+          <a:noFill/>
+        </p:spPr>
+        <p:txBody>
+          <a:bodyPr wrap="square" rtlCol="0">
+            <a:spAutoFit/>
+          </a:bodyPr>
+          <a:lstStyle/>
+          <a:p>
+            <a:pPr algn="ctr">
+              <a:lnSpc>
+                <a:spcPct val="120000"/>
+              </a:lnSpc>
+              <a:spcAft>
+                <a:spcPts val="600"/>
+              </a:spcAft>
+            </a:pPr>
+            <a:r>
+              <a:rPr lang="ko-KR" altLang="en-US" sz="1100" dirty="0">
+                <a:latin typeface="나눔스퀘어 네오 OTF Regular" panose="00000500000000000000" pitchFamily="50" charset="-127"/>
+                <a:ea typeface="나눔스퀘어 네오 OTF Regular" panose="00000500000000000000" pitchFamily="50" charset="-127"/>
+              </a:rPr>
+              <a:t>이벤트 타일</a:t>
+            </a:r>
+            <a:endParaRPr lang="en-US" altLang="ko-KR" sz="1100" dirty="0">
+              <a:latin typeface="나눔스퀘어 네오 OTF Regular" panose="00000500000000000000" pitchFamily="50" charset="-127"/>
+              <a:ea typeface="나눔스퀘어 네오 OTF Regular" panose="00000500000000000000" pitchFamily="50" charset="-127"/>
+            </a:endParaRPr>
+          </a:p>
+        </p:txBody>
+      </p:sp>
+      <p:sp>
+        <p:nvSpPr>
+          <p:cNvPr id="26" name="순서도: 처리 25">
+            <a:extLst>
+              <a:ext uri="{FF2B5EF4-FFF2-40B4-BE49-F238E27FC236}">
+                <a16:creationId xmlns:a16="http://schemas.microsoft.com/office/drawing/2014/main" id="{A6788439-75E7-41B3-87DE-BA113F4D08E1}"/>
+              </a:ext>
+            </a:extLst>
+          </p:cNvPr>
+          <p:cNvSpPr/>
+          <p:nvPr/>
+        </p:nvSpPr>
+        <p:spPr>
+          <a:xfrm>
+            <a:off x="6494134" y="2775234"/>
+            <a:ext cx="1045029" cy="579016"/>
+          </a:xfrm>
+          <a:prstGeom prst="flowChartProcess">
+            <a:avLst/>
+          </a:prstGeom>
+          <a:solidFill>
+            <a:schemeClr val="accent1">
+              <a:lumMod val="50000"/>
+              <a:alpha val="50000"/>
+            </a:schemeClr>
+          </a:solidFill>
+          <a:ln>
+            <a:noFill/>
+          </a:ln>
+        </p:spPr>
+        <p:style>
+          <a:lnRef idx="0">
+            <a:scrgbClr r="0" g="0" b="0"/>
+          </a:lnRef>
+          <a:fillRef idx="0">
+            <a:scrgbClr r="0" g="0" b="0"/>
+          </a:fillRef>
+          <a:effectRef idx="0">
+            <a:scrgbClr r="0" g="0" b="0"/>
+          </a:effectRef>
+          <a:fontRef idx="minor">
+            <a:schemeClr val="lt1"/>
+          </a:fontRef>
+        </p:style>
+        <p:txBody>
+          <a:bodyPr rtlCol="0" anchor="ctr"/>
+          <a:lstStyle/>
+          <a:p>
+            <a:pPr algn="ctr"/>
+            <a:r>
+              <a:rPr lang="ko-KR" altLang="en-US" sz="1100" dirty="0">
+                <a:latin typeface="나눔스퀘어 네오 OTF Regular" panose="00000500000000000000" pitchFamily="50" charset="-127"/>
+                <a:ea typeface="나눔스퀘어 네오 OTF Regular" panose="00000500000000000000" pitchFamily="50" charset="-127"/>
+              </a:rPr>
+              <a:t>통행료 지불</a:t>
+            </a:r>
+          </a:p>
+        </p:txBody>
+      </p:sp>
+      <p:sp>
+        <p:nvSpPr>
+          <p:cNvPr id="27" name="순서도: 처리 26">
+            <a:extLst>
+              <a:ext uri="{FF2B5EF4-FFF2-40B4-BE49-F238E27FC236}">
+                <a16:creationId xmlns:a16="http://schemas.microsoft.com/office/drawing/2014/main" id="{877B60FB-078E-4070-94C5-3CF677814289}"/>
+              </a:ext>
+            </a:extLst>
+          </p:cNvPr>
+          <p:cNvSpPr/>
+          <p:nvPr/>
+        </p:nvSpPr>
+        <p:spPr>
+          <a:xfrm>
+            <a:off x="6494134" y="1316954"/>
+            <a:ext cx="1045029" cy="579982"/>
+          </a:xfrm>
+          <a:prstGeom prst="flowChartProcess">
+            <a:avLst/>
+          </a:prstGeom>
+          <a:solidFill>
+            <a:schemeClr val="accent1">
+              <a:lumMod val="50000"/>
+              <a:alpha val="50000"/>
+            </a:schemeClr>
+          </a:solidFill>
+          <a:ln>
+            <a:noFill/>
+          </a:ln>
+        </p:spPr>
+        <p:style>
+          <a:lnRef idx="0">
+            <a:scrgbClr r="0" g="0" b="0"/>
+          </a:lnRef>
+          <a:fillRef idx="0">
+            <a:scrgbClr r="0" g="0" b="0"/>
+          </a:fillRef>
+          <a:effectRef idx="0">
+            <a:scrgbClr r="0" g="0" b="0"/>
+          </a:effectRef>
+          <a:fontRef idx="minor">
+            <a:schemeClr val="lt1"/>
+          </a:fontRef>
+        </p:style>
+        <p:txBody>
+          <a:bodyPr rtlCol="0" anchor="ctr"/>
+          <a:lstStyle/>
+          <a:p>
+            <a:pPr algn="ctr"/>
+            <a:r>
+              <a:rPr lang="ko-KR" altLang="en-US" sz="1100" dirty="0">
+                <a:latin typeface="나눔스퀘어 네오 OTF Regular" panose="00000500000000000000" pitchFamily="50" charset="-127"/>
+                <a:ea typeface="나눔스퀘어 네오 OTF Regular" panose="00000500000000000000" pitchFamily="50" charset="-127"/>
+              </a:rPr>
+              <a:t>토지 구매 가능</a:t>
+            </a:r>
+          </a:p>
+        </p:txBody>
+      </p:sp>
+      <p:sp>
+        <p:nvSpPr>
+          <p:cNvPr id="30" name="TextBox 29">
+            <a:extLst>
+              <a:ext uri="{FF2B5EF4-FFF2-40B4-BE49-F238E27FC236}">
+                <a16:creationId xmlns:a16="http://schemas.microsoft.com/office/drawing/2014/main" id="{982B7551-498F-49F1-ABDC-2350B950FD3F}"/>
+              </a:ext>
+            </a:extLst>
+          </p:cNvPr>
+          <p:cNvSpPr txBox="1"/>
+          <p:nvPr/>
+        </p:nvSpPr>
+        <p:spPr>
+          <a:xfrm>
+            <a:off x="5810855" y="1606945"/>
+            <a:ext cx="280219" cy="283732"/>
+          </a:xfrm>
+          <a:prstGeom prst="rect">
+            <a:avLst/>
+          </a:prstGeom>
+          <a:noFill/>
+        </p:spPr>
+        <p:txBody>
+          <a:bodyPr wrap="square" rtlCol="0">
+            <a:spAutoFit/>
+          </a:bodyPr>
+          <a:lstStyle/>
+          <a:p>
+            <a:pPr algn="ctr">
+              <a:lnSpc>
+                <a:spcPct val="120000"/>
+              </a:lnSpc>
+              <a:spcAft>
+                <a:spcPts val="600"/>
+              </a:spcAft>
+            </a:pPr>
+            <a:r>
+              <a:rPr lang="en-US" altLang="ko-KR" sz="1100" dirty="0">
+                <a:latin typeface="나눔스퀘어 네오 OTF Regular" panose="00000500000000000000" pitchFamily="50" charset="-127"/>
+                <a:ea typeface="나눔스퀘어 네오 OTF Regular" panose="00000500000000000000" pitchFamily="50" charset="-127"/>
+              </a:rPr>
+              <a:t>O</a:t>
+            </a:r>
+          </a:p>
+        </p:txBody>
+      </p:sp>
+      <p:sp>
+        <p:nvSpPr>
+          <p:cNvPr id="32" name="TextBox 31">
+            <a:extLst>
+              <a:ext uri="{FF2B5EF4-FFF2-40B4-BE49-F238E27FC236}">
+                <a16:creationId xmlns:a16="http://schemas.microsoft.com/office/drawing/2014/main" id="{1D8FC84A-513B-4F02-8363-740E4304C126}"/>
+              </a:ext>
+            </a:extLst>
+          </p:cNvPr>
+          <p:cNvSpPr txBox="1"/>
+          <p:nvPr/>
+        </p:nvSpPr>
+        <p:spPr>
+          <a:xfrm>
+            <a:off x="5810854" y="2770958"/>
+            <a:ext cx="280219" cy="283732"/>
+          </a:xfrm>
+          <a:prstGeom prst="rect">
+            <a:avLst/>
+          </a:prstGeom>
+          <a:noFill/>
+        </p:spPr>
+        <p:txBody>
+          <a:bodyPr wrap="square" rtlCol="0">
+            <a:spAutoFit/>
+          </a:bodyPr>
+          <a:lstStyle/>
+          <a:p>
+            <a:pPr algn="ctr">
+              <a:lnSpc>
+                <a:spcPct val="120000"/>
+              </a:lnSpc>
+              <a:spcAft>
+                <a:spcPts val="600"/>
+              </a:spcAft>
+            </a:pPr>
+            <a:r>
+              <a:rPr lang="en-US" altLang="ko-KR" sz="1100" dirty="0">
+                <a:latin typeface="나눔스퀘어 네오 OTF Regular" panose="00000500000000000000" pitchFamily="50" charset="-127"/>
+                <a:ea typeface="나눔스퀘어 네오 OTF Regular" panose="00000500000000000000" pitchFamily="50" charset="-127"/>
+              </a:rPr>
+              <a:t>X</a:t>
+            </a:r>
+          </a:p>
+        </p:txBody>
+      </p:sp>
+      <p:pic>
+        <p:nvPicPr>
+          <p:cNvPr id="33" name="그림 32">
+            <a:extLst>
+              <a:ext uri="{FF2B5EF4-FFF2-40B4-BE49-F238E27FC236}">
+                <a16:creationId xmlns:a16="http://schemas.microsoft.com/office/drawing/2014/main" id="{04B51C4E-077B-4608-80A4-B0AAF97FB12D}"/>
+              </a:ext>
+            </a:extLst>
+          </p:cNvPr>
+          <p:cNvPicPr>
+            <a:picLocks/>
+          </p:cNvPicPr>
+          <p:nvPr/>
+        </p:nvPicPr>
+        <p:blipFill rotWithShape="1">
+          <a:blip r:embed="rId3"/>
+          <a:srcRect l="1299" t="3068" r="1505" b="4833"/>
+          <a:stretch/>
+        </p:blipFill>
+        <p:spPr>
+          <a:xfrm>
+            <a:off x="6494134" y="1873205"/>
+            <a:ext cx="2160000" cy="720000"/>
+          </a:xfrm>
+          <a:prstGeom prst="rect">
+            <a:avLst/>
+          </a:prstGeom>
+        </p:spPr>
+      </p:pic>
+      <p:pic>
+        <p:nvPicPr>
+          <p:cNvPr id="38" name="그림 37">
+            <a:extLst>
+              <a:ext uri="{FF2B5EF4-FFF2-40B4-BE49-F238E27FC236}">
+                <a16:creationId xmlns:a16="http://schemas.microsoft.com/office/drawing/2014/main" id="{D1C46910-E5FE-49C7-A375-9DB9F9E12D90}"/>
+              </a:ext>
+            </a:extLst>
+          </p:cNvPr>
+          <p:cNvPicPr>
+            <a:picLocks/>
+          </p:cNvPicPr>
+          <p:nvPr/>
+        </p:nvPicPr>
+        <p:blipFill rotWithShape="1">
+          <a:blip r:embed="rId4"/>
+          <a:srcRect l="1317" t="2642" r="1735" b="8123"/>
+          <a:stretch/>
+        </p:blipFill>
+        <p:spPr>
+          <a:xfrm>
+            <a:off x="6494134" y="3354250"/>
+            <a:ext cx="2160000" cy="720000"/>
+          </a:xfrm>
+          <a:prstGeom prst="rect">
+            <a:avLst/>
+          </a:prstGeom>
+        </p:spPr>
+      </p:pic>
+      <p:sp>
+        <p:nvSpPr>
+          <p:cNvPr id="40" name="순서도: 처리 39">
+            <a:extLst>
+              <a:ext uri="{FF2B5EF4-FFF2-40B4-BE49-F238E27FC236}">
+                <a16:creationId xmlns:a16="http://schemas.microsoft.com/office/drawing/2014/main" id="{181F8E81-6937-4574-A88D-B0FFFA8F0768}"/>
+              </a:ext>
+            </a:extLst>
+          </p:cNvPr>
+          <p:cNvSpPr/>
+          <p:nvPr/>
+        </p:nvSpPr>
+        <p:spPr>
+          <a:xfrm>
+            <a:off x="6572509" y="4114839"/>
+            <a:ext cx="1045029" cy="579016"/>
+          </a:xfrm>
+          <a:prstGeom prst="flowChartProcess">
+            <a:avLst/>
+          </a:prstGeom>
+          <a:solidFill>
+            <a:schemeClr val="accent1">
+              <a:lumMod val="50000"/>
+              <a:alpha val="50000"/>
+            </a:schemeClr>
+          </a:solidFill>
+          <a:ln>
+            <a:noFill/>
+          </a:ln>
+        </p:spPr>
+        <p:style>
+          <a:lnRef idx="0">
+            <a:scrgbClr r="0" g="0" b="0"/>
+          </a:lnRef>
+          <a:fillRef idx="0">
+            <a:scrgbClr r="0" g="0" b="0"/>
+          </a:fillRef>
+          <a:effectRef idx="0">
+            <a:scrgbClr r="0" g="0" b="0"/>
+          </a:effectRef>
+          <a:fontRef idx="minor">
+            <a:schemeClr val="lt1"/>
+          </a:fontRef>
+        </p:style>
+        <p:txBody>
+          <a:bodyPr rtlCol="0" anchor="ctr"/>
+          <a:lstStyle/>
+          <a:p>
+            <a:pPr algn="ctr"/>
+            <a:r>
+              <a:rPr lang="ko-KR" altLang="en-US" sz="1100" dirty="0">
+                <a:latin typeface="나눔스퀘어 네오 OTF Regular" panose="00000500000000000000" pitchFamily="50" charset="-127"/>
+                <a:ea typeface="나눔스퀘어 네오 OTF Regular" panose="00000500000000000000" pitchFamily="50" charset="-127"/>
+              </a:rPr>
+              <a:t>월급 수령</a:t>
+            </a:r>
+          </a:p>
+        </p:txBody>
+      </p:sp>
+      <p:sp>
+        <p:nvSpPr>
+          <p:cNvPr id="41" name="순서도: 처리 40">
+            <a:extLst>
+              <a:ext uri="{FF2B5EF4-FFF2-40B4-BE49-F238E27FC236}">
+                <a16:creationId xmlns:a16="http://schemas.microsoft.com/office/drawing/2014/main" id="{EF85A020-A920-4321-B6A0-DDBF63E2687E}"/>
+              </a:ext>
+            </a:extLst>
+          </p:cNvPr>
+          <p:cNvSpPr/>
+          <p:nvPr/>
+        </p:nvSpPr>
+        <p:spPr>
+          <a:xfrm>
+            <a:off x="6572508" y="4891205"/>
+            <a:ext cx="1045029" cy="579016"/>
+          </a:xfrm>
+          <a:prstGeom prst="flowChartProcess">
+            <a:avLst/>
+          </a:prstGeom>
+          <a:solidFill>
+            <a:schemeClr val="accent1">
+              <a:lumMod val="50000"/>
+              <a:alpha val="50000"/>
+            </a:schemeClr>
+          </a:solidFill>
+          <a:ln>
+            <a:noFill/>
+          </a:ln>
+        </p:spPr>
+        <p:style>
+          <a:lnRef idx="0">
+            <a:scrgbClr r="0" g="0" b="0"/>
+          </a:lnRef>
+          <a:fillRef idx="0">
+            <a:scrgbClr r="0" g="0" b="0"/>
+          </a:fillRef>
+          <a:effectRef idx="0">
+            <a:scrgbClr r="0" g="0" b="0"/>
+          </a:effectRef>
+          <a:fontRef idx="minor">
+            <a:schemeClr val="lt1"/>
+          </a:fontRef>
+        </p:style>
+        <p:txBody>
+          <a:bodyPr rtlCol="0" anchor="ctr"/>
+          <a:lstStyle/>
+          <a:p>
+            <a:pPr algn="ctr"/>
+            <a:r>
+              <a:rPr lang="ko-KR" altLang="en-US" sz="1100" dirty="0">
+                <a:latin typeface="나눔스퀘어 네오 OTF Regular" panose="00000500000000000000" pitchFamily="50" charset="-127"/>
+                <a:ea typeface="나눔스퀘어 네오 OTF Regular" panose="00000500000000000000" pitchFamily="50" charset="-127"/>
+              </a:rPr>
+              <a:t>사회복지기금</a:t>
+            </a:r>
+          </a:p>
+        </p:txBody>
+      </p:sp>
+      <p:sp>
+        <p:nvSpPr>
+          <p:cNvPr id="42" name="순서도: 처리 41">
+            <a:extLst>
+              <a:ext uri="{FF2B5EF4-FFF2-40B4-BE49-F238E27FC236}">
+                <a16:creationId xmlns:a16="http://schemas.microsoft.com/office/drawing/2014/main" id="{2A832B13-402A-4531-87C1-CBAE2D6772F8}"/>
+              </a:ext>
+            </a:extLst>
+          </p:cNvPr>
+          <p:cNvSpPr/>
+          <p:nvPr/>
+        </p:nvSpPr>
+        <p:spPr>
+          <a:xfrm>
+            <a:off x="6572507" y="5672007"/>
+            <a:ext cx="1045029" cy="579016"/>
+          </a:xfrm>
+          <a:prstGeom prst="flowChartProcess">
+            <a:avLst/>
+          </a:prstGeom>
+          <a:solidFill>
+            <a:schemeClr val="accent1">
+              <a:lumMod val="50000"/>
+              <a:alpha val="50000"/>
+            </a:schemeClr>
+          </a:solidFill>
+          <a:ln>
+            <a:noFill/>
+          </a:ln>
+        </p:spPr>
+        <p:style>
+          <a:lnRef idx="0">
+            <a:scrgbClr r="0" g="0" b="0"/>
+          </a:lnRef>
+          <a:fillRef idx="0">
+            <a:scrgbClr r="0" g="0" b="0"/>
+          </a:fillRef>
+          <a:effectRef idx="0">
+            <a:scrgbClr r="0" g="0" b="0"/>
+          </a:effectRef>
+          <a:fontRef idx="minor">
+            <a:schemeClr val="lt1"/>
+          </a:fontRef>
+        </p:style>
+        <p:txBody>
+          <a:bodyPr rtlCol="0" anchor="ctr"/>
+          <a:lstStyle/>
+          <a:p>
+            <a:pPr algn="ctr"/>
+            <a:r>
+              <a:rPr lang="ko-KR" altLang="en-US" sz="1100" dirty="0">
+                <a:latin typeface="나눔스퀘어 네오 OTF Regular" panose="00000500000000000000" pitchFamily="50" charset="-127"/>
+                <a:ea typeface="나눔스퀘어 네오 OTF Regular" panose="00000500000000000000" pitchFamily="50" charset="-127"/>
+              </a:rPr>
+              <a:t>부동산세금</a:t>
+            </a:r>
+          </a:p>
+        </p:txBody>
+      </p:sp>
+      <p:cxnSp>
+        <p:nvCxnSpPr>
+          <p:cNvPr id="12" name="직선 화살표 연결선 11">
+            <a:extLst>
+              <a:ext uri="{FF2B5EF4-FFF2-40B4-BE49-F238E27FC236}">
+                <a16:creationId xmlns:a16="http://schemas.microsoft.com/office/drawing/2014/main" id="{BDAFD0D5-28A7-4635-93C6-77A23C888B11}"/>
+              </a:ext>
+            </a:extLst>
+          </p:cNvPr>
+          <p:cNvCxnSpPr>
+            <a:cxnSpLocks/>
+          </p:cNvCxnSpPr>
+          <p:nvPr/>
+        </p:nvCxnSpPr>
+        <p:spPr>
+          <a:xfrm flipV="1">
+            <a:off x="1681090" y="3772987"/>
+            <a:ext cx="371471" cy="6468"/>
+          </a:xfrm>
+          <a:prstGeom prst="straightConnector1">
+            <a:avLst/>
+          </a:prstGeom>
+          <a:ln>
+            <a:tailEnd type="triangle"/>
+          </a:ln>
+        </p:spPr>
+        <p:style>
+          <a:lnRef idx="2">
+            <a:schemeClr val="accent1"/>
+          </a:lnRef>
+          <a:fillRef idx="0">
+            <a:schemeClr val="accent1"/>
+          </a:fillRef>
+          <a:effectRef idx="1">
+            <a:schemeClr val="accent1"/>
+          </a:effectRef>
+          <a:fontRef idx="minor">
+            <a:schemeClr val="tx1"/>
+          </a:fontRef>
+        </p:style>
+      </p:cxnSp>
+      <p:cxnSp>
+        <p:nvCxnSpPr>
+          <p:cNvPr id="36" name="직선 화살표 연결선 35">
+            <a:extLst>
+              <a:ext uri="{FF2B5EF4-FFF2-40B4-BE49-F238E27FC236}">
+                <a16:creationId xmlns:a16="http://schemas.microsoft.com/office/drawing/2014/main" id="{FDDDBFD7-6BFD-4BEA-BDE2-D6D6B5BF6EE3}"/>
+              </a:ext>
+            </a:extLst>
+          </p:cNvPr>
+          <p:cNvCxnSpPr>
+            <a:cxnSpLocks/>
+          </p:cNvCxnSpPr>
+          <p:nvPr/>
+        </p:nvCxnSpPr>
+        <p:spPr>
+          <a:xfrm flipV="1">
+            <a:off x="3129374" y="3769753"/>
+            <a:ext cx="371471" cy="6468"/>
+          </a:xfrm>
+          <a:prstGeom prst="straightConnector1">
+            <a:avLst/>
+          </a:prstGeom>
+          <a:ln>
+            <a:tailEnd type="triangle"/>
+          </a:ln>
+        </p:spPr>
+        <p:style>
+          <a:lnRef idx="2">
+            <a:schemeClr val="accent1"/>
+          </a:lnRef>
+          <a:fillRef idx="0">
+            <a:schemeClr val="accent1"/>
+          </a:fillRef>
+          <a:effectRef idx="1">
+            <a:schemeClr val="accent1"/>
+          </a:effectRef>
+          <a:fontRef idx="minor">
+            <a:schemeClr val="tx1"/>
+          </a:fontRef>
+        </p:style>
+      </p:cxnSp>
+      <p:cxnSp>
+        <p:nvCxnSpPr>
+          <p:cNvPr id="37" name="직선 화살표 연결선 36">
+            <a:extLst>
+              <a:ext uri="{FF2B5EF4-FFF2-40B4-BE49-F238E27FC236}">
+                <a16:creationId xmlns:a16="http://schemas.microsoft.com/office/drawing/2014/main" id="{DA3C369E-FBB1-4E02-A46A-E28B5958A93D}"/>
+              </a:ext>
+            </a:extLst>
+          </p:cNvPr>
+          <p:cNvCxnSpPr>
+            <a:cxnSpLocks/>
+          </p:cNvCxnSpPr>
+          <p:nvPr/>
+        </p:nvCxnSpPr>
+        <p:spPr>
+          <a:xfrm flipV="1">
+            <a:off x="4493079" y="2644963"/>
+            <a:ext cx="567534" cy="819454"/>
+          </a:xfrm>
+          <a:prstGeom prst="straightConnector1">
+            <a:avLst/>
+          </a:prstGeom>
+          <a:ln>
+            <a:tailEnd type="triangle"/>
+          </a:ln>
+        </p:spPr>
+        <p:style>
+          <a:lnRef idx="2">
+            <a:schemeClr val="accent1"/>
+          </a:lnRef>
+          <a:fillRef idx="0">
+            <a:schemeClr val="accent1"/>
+          </a:fillRef>
+          <a:effectRef idx="1">
+            <a:schemeClr val="accent1"/>
+          </a:effectRef>
+          <a:fontRef idx="minor">
+            <a:schemeClr val="tx1"/>
+          </a:fontRef>
+        </p:style>
+      </p:cxnSp>
+      <p:cxnSp>
+        <p:nvCxnSpPr>
+          <p:cNvPr id="46" name="직선 화살표 연결선 45">
+            <a:extLst>
+              <a:ext uri="{FF2B5EF4-FFF2-40B4-BE49-F238E27FC236}">
+                <a16:creationId xmlns:a16="http://schemas.microsoft.com/office/drawing/2014/main" id="{95A3A2A1-8270-40B0-B707-FD8DDB4EED3D}"/>
+              </a:ext>
+            </a:extLst>
+          </p:cNvPr>
+          <p:cNvCxnSpPr>
+            <a:cxnSpLocks/>
+          </p:cNvCxnSpPr>
+          <p:nvPr/>
+        </p:nvCxnSpPr>
+        <p:spPr>
+          <a:xfrm>
+            <a:off x="4501271" y="4084971"/>
+            <a:ext cx="490820" cy="868046"/>
+          </a:xfrm>
+          <a:prstGeom prst="straightConnector1">
+            <a:avLst/>
+          </a:prstGeom>
+          <a:ln>
+            <a:tailEnd type="triangle"/>
+          </a:ln>
+        </p:spPr>
+        <p:style>
+          <a:lnRef idx="2">
+            <a:schemeClr val="accent1"/>
+          </a:lnRef>
+          <a:fillRef idx="0">
+            <a:schemeClr val="accent1"/>
+          </a:fillRef>
+          <a:effectRef idx="1">
+            <a:schemeClr val="accent1"/>
+          </a:effectRef>
+          <a:fontRef idx="minor">
+            <a:schemeClr val="tx1"/>
+          </a:fontRef>
+        </p:style>
+      </p:cxnSp>
+      <p:cxnSp>
+        <p:nvCxnSpPr>
+          <p:cNvPr id="47" name="직선 화살표 연결선 46">
+            <a:extLst>
+              <a:ext uri="{FF2B5EF4-FFF2-40B4-BE49-F238E27FC236}">
+                <a16:creationId xmlns:a16="http://schemas.microsoft.com/office/drawing/2014/main" id="{C5649202-7AF5-4A76-A1A0-AE9926CB5D85}"/>
+              </a:ext>
+            </a:extLst>
+          </p:cNvPr>
+          <p:cNvCxnSpPr>
+            <a:cxnSpLocks/>
+          </p:cNvCxnSpPr>
+          <p:nvPr/>
+        </p:nvCxnSpPr>
+        <p:spPr>
+          <a:xfrm>
+            <a:off x="6175959" y="5180713"/>
+            <a:ext cx="371471" cy="0"/>
+          </a:xfrm>
+          <a:prstGeom prst="straightConnector1">
+            <a:avLst/>
+          </a:prstGeom>
+          <a:ln>
+            <a:tailEnd type="triangle"/>
+          </a:ln>
+        </p:spPr>
+        <p:style>
+          <a:lnRef idx="2">
+            <a:schemeClr val="accent1"/>
+          </a:lnRef>
+          <a:fillRef idx="0">
+            <a:schemeClr val="accent1"/>
+          </a:fillRef>
+          <a:effectRef idx="1">
+            <a:schemeClr val="accent1"/>
+          </a:effectRef>
+          <a:fontRef idx="minor">
+            <a:schemeClr val="tx1"/>
+          </a:fontRef>
+        </p:style>
+      </p:cxnSp>
+      <p:cxnSp>
+        <p:nvCxnSpPr>
+          <p:cNvPr id="48" name="직선 화살표 연결선 47">
+            <a:extLst>
+              <a:ext uri="{FF2B5EF4-FFF2-40B4-BE49-F238E27FC236}">
+                <a16:creationId xmlns:a16="http://schemas.microsoft.com/office/drawing/2014/main" id="{66146FCF-7670-4FCF-A6C5-4D111B477858}"/>
+              </a:ext>
+            </a:extLst>
+          </p:cNvPr>
+          <p:cNvCxnSpPr>
+            <a:cxnSpLocks/>
+          </p:cNvCxnSpPr>
+          <p:nvPr/>
+        </p:nvCxnSpPr>
+        <p:spPr>
+          <a:xfrm>
+            <a:off x="6060582" y="5341264"/>
+            <a:ext cx="385176" cy="611596"/>
+          </a:xfrm>
+          <a:prstGeom prst="straightConnector1">
+            <a:avLst/>
+          </a:prstGeom>
+          <a:ln>
+            <a:tailEnd type="triangle"/>
+          </a:ln>
+        </p:spPr>
+        <p:style>
+          <a:lnRef idx="2">
+            <a:schemeClr val="accent1"/>
+          </a:lnRef>
+          <a:fillRef idx="0">
+            <a:schemeClr val="accent1"/>
+          </a:fillRef>
+          <a:effectRef idx="1">
+            <a:schemeClr val="accent1"/>
+          </a:effectRef>
+          <a:fontRef idx="minor">
+            <a:schemeClr val="tx1"/>
+          </a:fontRef>
+        </p:style>
+      </p:cxnSp>
+      <p:cxnSp>
+        <p:nvCxnSpPr>
+          <p:cNvPr id="50" name="직선 화살표 연결선 49">
+            <a:extLst>
+              <a:ext uri="{FF2B5EF4-FFF2-40B4-BE49-F238E27FC236}">
+                <a16:creationId xmlns:a16="http://schemas.microsoft.com/office/drawing/2014/main" id="{AA9242DB-6E5E-44CE-8F65-3CBE68077E72}"/>
+              </a:ext>
+            </a:extLst>
+          </p:cNvPr>
+          <p:cNvCxnSpPr>
+            <a:cxnSpLocks/>
+          </p:cNvCxnSpPr>
+          <p:nvPr/>
+        </p:nvCxnSpPr>
+        <p:spPr>
+          <a:xfrm flipV="1">
+            <a:off x="6045290" y="4381938"/>
+            <a:ext cx="401884" cy="600750"/>
+          </a:xfrm>
+          <a:prstGeom prst="straightConnector1">
+            <a:avLst/>
+          </a:prstGeom>
+          <a:ln>
+            <a:tailEnd type="triangle"/>
+          </a:ln>
+        </p:spPr>
+        <p:style>
+          <a:lnRef idx="2">
+            <a:schemeClr val="accent1"/>
+          </a:lnRef>
+          <a:fillRef idx="0">
+            <a:schemeClr val="accent1"/>
+          </a:fillRef>
+          <a:effectRef idx="1">
+            <a:schemeClr val="accent1"/>
+          </a:effectRef>
+          <a:fontRef idx="minor">
+            <a:schemeClr val="tx1"/>
+          </a:fontRef>
+        </p:style>
+      </p:cxnSp>
+      <p:cxnSp>
+        <p:nvCxnSpPr>
+          <p:cNvPr id="53" name="직선 화살표 연결선 52">
+            <a:extLst>
+              <a:ext uri="{FF2B5EF4-FFF2-40B4-BE49-F238E27FC236}">
+                <a16:creationId xmlns:a16="http://schemas.microsoft.com/office/drawing/2014/main" id="{4D50BEF1-DEA5-4D96-A866-FCC8317A96E4}"/>
+              </a:ext>
+            </a:extLst>
+          </p:cNvPr>
+          <p:cNvCxnSpPr>
+            <a:cxnSpLocks/>
+          </p:cNvCxnSpPr>
+          <p:nvPr/>
+        </p:nvCxnSpPr>
+        <p:spPr>
+          <a:xfrm>
+            <a:off x="5966845" y="2548546"/>
+            <a:ext cx="385176" cy="611596"/>
+          </a:xfrm>
+          <a:prstGeom prst="straightConnector1">
+            <a:avLst/>
+          </a:prstGeom>
+          <a:ln>
+            <a:tailEnd type="triangle"/>
+          </a:ln>
+        </p:spPr>
+        <p:style>
+          <a:lnRef idx="2">
+            <a:schemeClr val="accent1"/>
+          </a:lnRef>
+          <a:fillRef idx="0">
+            <a:schemeClr val="accent1"/>
+          </a:fillRef>
+          <a:effectRef idx="1">
+            <a:schemeClr val="accent1"/>
+          </a:effectRef>
+          <a:fontRef idx="minor">
+            <a:schemeClr val="tx1"/>
+          </a:fontRef>
+        </p:style>
+      </p:cxnSp>
+      <p:cxnSp>
+        <p:nvCxnSpPr>
+          <p:cNvPr id="56" name="직선 화살표 연결선 55">
+            <a:extLst>
+              <a:ext uri="{FF2B5EF4-FFF2-40B4-BE49-F238E27FC236}">
+                <a16:creationId xmlns:a16="http://schemas.microsoft.com/office/drawing/2014/main" id="{76244510-EDD5-4DED-ADFF-52E2CEB3761F}"/>
+              </a:ext>
+            </a:extLst>
+          </p:cNvPr>
+          <p:cNvCxnSpPr>
+            <a:cxnSpLocks/>
+          </p:cNvCxnSpPr>
+          <p:nvPr/>
+        </p:nvCxnSpPr>
+        <p:spPr>
+          <a:xfrm flipV="1">
+            <a:off x="5951553" y="1589220"/>
+            <a:ext cx="401884" cy="600750"/>
+          </a:xfrm>
+          <a:prstGeom prst="straightConnector1">
+            <a:avLst/>
+          </a:prstGeom>
+          <a:ln>
+            <a:tailEnd type="triangle"/>
+          </a:ln>
+        </p:spPr>
+        <p:style>
+          <a:lnRef idx="2">
+            <a:schemeClr val="accent1"/>
+          </a:lnRef>
+          <a:fillRef idx="0">
+            <a:schemeClr val="accent1"/>
+          </a:fillRef>
+          <a:effectRef idx="1">
+            <a:schemeClr val="accent1"/>
+          </a:effectRef>
+          <a:fontRef idx="minor">
+            <a:schemeClr val="tx1"/>
+          </a:fontRef>
+        </p:style>
+      </p:cxnSp>
+    </p:spTree>
+    <p:extLst>
+      <p:ext uri="{BB962C8B-B14F-4D97-AF65-F5344CB8AC3E}">
+        <p14:creationId xmlns:p14="http://schemas.microsoft.com/office/powerpoint/2010/main" val="53610515"/>
+      </p:ext>
+    </p:extLst>
+  </p:cSld>
+  <p:clrMapOvr>
+    <a:masterClrMapping/>
+  </p:clrMapOvr>
+</p:sld>
+</file>
+
+<file path=ppt/slides/slide4.xml><?xml version="1.0" encoding="utf-8"?>
+<p:sld xmlns:a="http://schemas.openxmlformats.org/drawingml/2006/main" xmlns:r="http://schemas.openxmlformats.org/officeDocument/2006/relationships" xmlns:p="http://schemas.openxmlformats.org/presentationml/2006/main">
+  <p:cSld>
+    <p:spTree>
+      <p:nvGrpSpPr>
+        <p:cNvPr id="1" name=""/>
+        <p:cNvGrpSpPr/>
+        <p:nvPr/>
+      </p:nvGrpSpPr>
+      <p:grpSpPr>
+        <a:xfrm>
+          <a:off x="0" y="0"/>
+          <a:ext cx="0" cy="0"/>
+          <a:chOff x="0" y="0"/>
+          <a:chExt cx="0" cy="0"/>
+        </a:xfrm>
+      </p:grpSpPr>
+      <p:sp>
+        <p:nvSpPr>
+          <p:cNvPr id="2" name="제목 1">
+            <a:extLst>
+              <a:ext uri="{FF2B5EF4-FFF2-40B4-BE49-F238E27FC236}">
+                <a16:creationId xmlns:a16="http://schemas.microsoft.com/office/drawing/2014/main" id="{669222B5-D6F0-4947-B246-583D90317449}"/>
+              </a:ext>
+            </a:extLst>
+          </p:cNvPr>
+          <p:cNvSpPr>
+            <a:spLocks noGrp="1"/>
+          </p:cNvSpPr>
+          <p:nvPr>
+            <p:ph type="title"/>
+          </p:nvPr>
+        </p:nvSpPr>
+        <p:spPr/>
+        <p:txBody>
+          <a:bodyPr/>
+          <a:lstStyle/>
+          <a:p>
+            <a:r>
+              <a:rPr kumimoji="1" lang="en-US" altLang="en-US" b="1" dirty="0"/>
+              <a:t>Rust</a:t>
+            </a:r>
+            <a:r>
+              <a:rPr kumimoji="1" lang="ko-KR" altLang="en-US" b="1" dirty="0"/>
+              <a:t> 코드 기반 테스트를 위한 개발 프로젝트</a:t>
+            </a:r>
+            <a:endParaRPr kumimoji="1" lang="x-none" altLang="en-US" b="1" dirty="0"/>
+          </a:p>
+        </p:txBody>
+      </p:sp>
+      <p:sp>
+        <p:nvSpPr>
+          <p:cNvPr id="3" name="슬라이드 번호 개체 틀 2"/>
+          <p:cNvSpPr>
+            <a:spLocks noGrp="1"/>
+          </p:cNvSpPr>
+          <p:nvPr>
+            <p:ph type="sldNum" sz="quarter" idx="12"/>
+          </p:nvPr>
+        </p:nvSpPr>
+        <p:spPr/>
+        <p:txBody>
+          <a:bodyPr/>
+          <a:lstStyle/>
+          <a:p>
+            <a:pPr defTabSz="457189" latinLnBrk="0"/>
+            <a:fld id="{369BBEF4-35F7-054D-BCC4-3F145CEF9DF2}" type="slidenum">
+              <a:rPr kumimoji="1" lang="x-none" altLang="en-US">
+                <a:solidFill>
+                  <a:prstClr val="black"/>
+                </a:solidFill>
+                <a:ea typeface="나눔스퀘어 네오 OTF Bold"/>
+              </a:rPr>
+              <a:pPr defTabSz="457189" latinLnBrk="0"/>
+              <a:t>4</a:t>
+            </a:fld>
+            <a:endParaRPr kumimoji="1" lang="x-none" altLang="en-US">
+              <a:solidFill>
+                <a:prstClr val="black"/>
+              </a:solidFill>
+              <a:ea typeface="나눔스퀘어 네오 OTF Bold"/>
+            </a:endParaRPr>
+          </a:p>
+        </p:txBody>
+      </p:sp>
+      <p:sp>
+        <p:nvSpPr>
+          <p:cNvPr id="7" name="TextBox 6">
+            <a:extLst>
+              <a:ext uri="{FF2B5EF4-FFF2-40B4-BE49-F238E27FC236}">
+                <a16:creationId xmlns:a16="http://schemas.microsoft.com/office/drawing/2014/main" id="{3B4A1112-C52D-79DD-E60E-0B980867FE5A}"/>
+              </a:ext>
+            </a:extLst>
+          </p:cNvPr>
+          <p:cNvSpPr txBox="1">
+            <a:spLocks noChangeAspect="1"/>
+          </p:cNvSpPr>
+          <p:nvPr/>
+        </p:nvSpPr>
+        <p:spPr>
+          <a:xfrm>
             <a:off x="438662" y="1316954"/>
             <a:ext cx="8264569" cy="301173"/>
           </a:xfrm>
@@ -17013,7 +18399,7 @@
         </p:nvSpPr>
         <p:spPr>
           <a:xfrm rot="10800000">
-            <a:off x="4904423" y="5131147"/>
+            <a:off x="4878296" y="5253071"/>
             <a:ext cx="660354" cy="338554"/>
           </a:xfrm>
           <a:prstGeom prst="rightArrow">
@@ -17067,7 +18453,7 @@
         </p:nvSpPr>
         <p:spPr>
           <a:xfrm>
-            <a:off x="5573488" y="5058147"/>
+            <a:off x="5547361" y="5180071"/>
             <a:ext cx="1306284" cy="486865"/>
           </a:xfrm>
           <a:prstGeom prst="rect">
@@ -17302,14 +18688,7 @@
                 <a:latin typeface="나눔스퀘어 네오 OTF Regular" panose="00000500000000000000" pitchFamily="50" charset="-127"/>
                 <a:ea typeface="나눔스퀘어 네오 OTF Regular" panose="00000500000000000000" pitchFamily="50" charset="-127"/>
               </a:rPr>
-              <a:t>현재 턴 </a:t>
-            </a:r>
-            <a:r>
-              <a:rPr lang="ko-KR" altLang="en-US" sz="1100">
-                <a:latin typeface="나눔스퀘어 네오 OTF Regular" panose="00000500000000000000" pitchFamily="50" charset="-127"/>
-                <a:ea typeface="나눔스퀘어 네오 OTF Regular" panose="00000500000000000000" pitchFamily="50" charset="-127"/>
-              </a:rPr>
-              <a:t>플레이어</a:t>
+              <a:t>현재 턴 플레이어</a:t>
             </a:r>
             <a:r>
               <a:rPr lang="en-US" altLang="ko-KR" sz="1100" dirty="0">
@@ -17510,7 +18889,7 @@
         </p:blipFill>
         <p:spPr>
           <a:xfrm>
-            <a:off x="5929559" y="1395110"/>
+            <a:off x="5929559" y="1238352"/>
             <a:ext cx="2772786" cy="2132077"/>
           </a:xfrm>
           <a:prstGeom prst="rect">
@@ -17665,14 +19044,7 @@
                 <a:latin typeface="나눔스퀘어 네오 OTF Regular" panose="00000500000000000000" pitchFamily="50" charset="-127"/>
                 <a:ea typeface="나눔스퀘어 네오 OTF Regular" panose="00000500000000000000" pitchFamily="50" charset="-127"/>
               </a:rPr>
-              <a:t>유저 </a:t>
-            </a:r>
-            <a:r>
-              <a:rPr lang="ko-KR" altLang="en-US" sz="1100">
-                <a:latin typeface="나눔스퀘어 네오 OTF Regular" panose="00000500000000000000" pitchFamily="50" charset="-127"/>
-                <a:ea typeface="나눔스퀘어 네오 OTF Regular" panose="00000500000000000000" pitchFamily="50" charset="-127"/>
-              </a:rPr>
-              <a:t>인터페이스 버튼</a:t>
+              <a:t>유저 인터페이스 버튼</a:t>
             </a:r>
             <a:endParaRPr lang="en-US" altLang="ko-KR" sz="1100" dirty="0">
               <a:latin typeface="나눔스퀘어 네오 OTF Regular" panose="00000500000000000000" pitchFamily="50" charset="-127"/>
@@ -17681,71 +19053,6 @@
           </a:p>
         </p:txBody>
       </p:sp>
-      <p:pic>
-        <p:nvPicPr>
-          <p:cNvPr id="36" name="그림 35">
-            <a:extLst>
-              <a:ext uri="{FF2B5EF4-FFF2-40B4-BE49-F238E27FC236}">
-                <a16:creationId xmlns:a16="http://schemas.microsoft.com/office/drawing/2014/main" id="{5296CBB1-ECEE-4DBB-8F04-FE4EF28A3551}"/>
-              </a:ext>
-            </a:extLst>
-          </p:cNvPr>
-          <p:cNvPicPr>
-            <a:picLocks noChangeAspect="1"/>
-          </p:cNvPicPr>
-          <p:nvPr/>
-        </p:nvPicPr>
-        <p:blipFill>
-          <a:blip r:embed="rId6">
-            <a:extLst>
-              <a:ext uri="{28A0092B-C50C-407E-A947-70E740481C1C}">
-                <a14:useLocalDpi xmlns:a14="http://schemas.microsoft.com/office/drawing/2010/main" val="0"/>
-              </a:ext>
-            </a:extLst>
-          </a:blip>
-          <a:stretch>
-            <a:fillRect/>
-          </a:stretch>
-        </p:blipFill>
-        <p:spPr>
-          <a:xfrm>
-            <a:off x="4534971" y="897717"/>
-            <a:ext cx="785967" cy="785967"/>
-          </a:xfrm>
-          <a:prstGeom prst="rect">
-            <a:avLst/>
-          </a:prstGeom>
-        </p:spPr>
-      </p:pic>
-      <p:pic>
-        <p:nvPicPr>
-          <p:cNvPr id="28" name="그림 27">
-            <a:extLst>
-              <a:ext uri="{FF2B5EF4-FFF2-40B4-BE49-F238E27FC236}">
-                <a16:creationId xmlns:a16="http://schemas.microsoft.com/office/drawing/2014/main" id="{93A7C18D-3826-4C7F-AE06-433E9166AFB1}"/>
-              </a:ext>
-            </a:extLst>
-          </p:cNvPr>
-          <p:cNvPicPr>
-            <a:picLocks/>
-          </p:cNvPicPr>
-          <p:nvPr/>
-        </p:nvPicPr>
-        <p:blipFill rotWithShape="1">
-          <a:blip r:embed="rId7"/>
-          <a:srcRect l="1299" t="4811" r="1505" b="6967"/>
-          <a:stretch/>
-        </p:blipFill>
-        <p:spPr>
-          <a:xfrm>
-            <a:off x="6542345" y="3771542"/>
-            <a:ext cx="2160000" cy="810073"/>
-          </a:xfrm>
-          <a:prstGeom prst="rect">
-            <a:avLst/>
-          </a:prstGeom>
-        </p:spPr>
-      </p:pic>
       <p:sp>
         <p:nvSpPr>
           <p:cNvPr id="31" name="TextBox 30">
@@ -17762,7 +19069,7 @@
         </p:nvSpPr>
         <p:spPr>
           <a:xfrm>
-            <a:off x="6542345" y="4581615"/>
+            <a:off x="5929559" y="4680032"/>
             <a:ext cx="2160000" cy="275075"/>
           </a:xfrm>
           <a:prstGeom prst="rect">
@@ -17865,343 +19172,12 @@
           </a:p>
         </p:txBody>
       </p:sp>
-    </p:spTree>
-    <p:extLst>
-      <p:ext uri="{BB962C8B-B14F-4D97-AF65-F5344CB8AC3E}">
-        <p14:creationId xmlns:p14="http://schemas.microsoft.com/office/powerpoint/2010/main" val="1149889887"/>
-      </p:ext>
-    </p:extLst>
-  </p:cSld>
-  <p:clrMapOvr>
-    <a:masterClrMapping/>
-  </p:clrMapOvr>
-</p:sld>
-</file>
-
-<file path=ppt/slides/slide4.xml><?xml version="1.0" encoding="utf-8"?>
-<p:sld xmlns:a="http://schemas.openxmlformats.org/drawingml/2006/main" xmlns:r="http://schemas.openxmlformats.org/officeDocument/2006/relationships" xmlns:p="http://schemas.openxmlformats.org/presentationml/2006/main">
-  <p:cSld>
-    <p:spTree>
-      <p:nvGrpSpPr>
-        <p:cNvPr id="1" name=""/>
-        <p:cNvGrpSpPr/>
-        <p:nvPr/>
-      </p:nvGrpSpPr>
-      <p:grpSpPr>
-        <a:xfrm>
-          <a:off x="0" y="0"/>
-          <a:ext cx="0" cy="0"/>
-          <a:chOff x="0" y="0"/>
-          <a:chExt cx="0" cy="0"/>
-        </a:xfrm>
-      </p:grpSpPr>
-      <p:sp>
-        <p:nvSpPr>
-          <p:cNvPr id="2" name="제목 1">
-            <a:extLst>
-              <a:ext uri="{FF2B5EF4-FFF2-40B4-BE49-F238E27FC236}">
-                <a16:creationId xmlns:a16="http://schemas.microsoft.com/office/drawing/2014/main" id="{669222B5-D6F0-4947-B246-583D90317449}"/>
-              </a:ext>
-            </a:extLst>
-          </p:cNvPr>
-          <p:cNvSpPr>
-            <a:spLocks noGrp="1"/>
-          </p:cNvSpPr>
-          <p:nvPr>
-            <p:ph type="title"/>
-          </p:nvPr>
-        </p:nvSpPr>
-        <p:spPr/>
-        <p:txBody>
-          <a:bodyPr/>
-          <a:lstStyle/>
-          <a:p>
-            <a:r>
-              <a:rPr kumimoji="1" lang="en-US" altLang="en-US" b="1" dirty="0"/>
-              <a:t>Rust</a:t>
-            </a:r>
-            <a:r>
-              <a:rPr kumimoji="1" lang="ko-KR" altLang="en-US" b="1" dirty="0"/>
-              <a:t> 코드 기반 테스트를 위한 개발 프로젝트</a:t>
-            </a:r>
-            <a:endParaRPr kumimoji="1" lang="x-none" altLang="en-US" b="1" dirty="0"/>
-          </a:p>
-        </p:txBody>
-      </p:sp>
-      <p:sp>
-        <p:nvSpPr>
-          <p:cNvPr id="3" name="슬라이드 번호 개체 틀 2"/>
-          <p:cNvSpPr>
-            <a:spLocks noGrp="1"/>
-          </p:cNvSpPr>
-          <p:nvPr>
-            <p:ph type="sldNum" sz="quarter" idx="12"/>
-          </p:nvPr>
-        </p:nvSpPr>
-        <p:spPr/>
-        <p:txBody>
-          <a:bodyPr/>
-          <a:lstStyle/>
-          <a:p>
-            <a:pPr defTabSz="457189" latinLnBrk="0"/>
-            <a:fld id="{369BBEF4-35F7-054D-BCC4-3F145CEF9DF2}" type="slidenum">
-              <a:rPr kumimoji="1" lang="x-none" altLang="en-US">
-                <a:solidFill>
-                  <a:prstClr val="black"/>
-                </a:solidFill>
-                <a:ea typeface="나눔스퀘어 네오 OTF Bold"/>
-              </a:rPr>
-              <a:pPr defTabSz="457189" latinLnBrk="0"/>
-              <a:t>4</a:t>
-            </a:fld>
-            <a:endParaRPr kumimoji="1" lang="x-none" altLang="en-US">
-              <a:solidFill>
-                <a:prstClr val="black"/>
-              </a:solidFill>
-              <a:ea typeface="나눔스퀘어 네오 OTF Bold"/>
-            </a:endParaRPr>
-          </a:p>
-        </p:txBody>
-      </p:sp>
-      <p:sp>
-        <p:nvSpPr>
-          <p:cNvPr id="7" name="TextBox 6">
-            <a:extLst>
-              <a:ext uri="{FF2B5EF4-FFF2-40B4-BE49-F238E27FC236}">
-                <a16:creationId xmlns:a16="http://schemas.microsoft.com/office/drawing/2014/main" id="{3B4A1112-C52D-79DD-E60E-0B980867FE5A}"/>
-              </a:ext>
-            </a:extLst>
-          </p:cNvPr>
-          <p:cNvSpPr txBox="1">
-            <a:spLocks noChangeAspect="1"/>
-          </p:cNvSpPr>
-          <p:nvPr/>
-        </p:nvSpPr>
-        <p:spPr>
-          <a:xfrm>
-            <a:off x="438662" y="1316954"/>
-            <a:ext cx="8264569" cy="301173"/>
-          </a:xfrm>
-          <a:prstGeom prst="rect">
-            <a:avLst/>
-          </a:prstGeom>
-          <a:noFill/>
-        </p:spPr>
-        <p:txBody>
-          <a:bodyPr wrap="square" rtlCol="0">
-            <a:spAutoFit/>
-          </a:bodyPr>
-          <a:lstStyle/>
-          <a:p>
-            <a:pPr marL="143996" lvl="1" indent="-143996">
-              <a:lnSpc>
-                <a:spcPct val="120000"/>
-              </a:lnSpc>
-              <a:spcBef>
-                <a:spcPts val="600"/>
-              </a:spcBef>
-              <a:spcAft>
-                <a:spcPts val="400"/>
-              </a:spcAft>
-              <a:buFont typeface="Wingdings" panose="05000000000000000000" pitchFamily="2" charset="2"/>
-              <a:buChar char="§"/>
-              <a:defRPr/>
-            </a:pPr>
-            <a:r>
-              <a:rPr lang="en-US" altLang="ko-KR" sz="1200" dirty="0">
-                <a:solidFill>
-                  <a:prstClr val="black"/>
-                </a:solidFill>
-                <a:ea typeface="나눔스퀘어 네오 OTF Bold"/>
-                <a:hlinkClick r:id="rId3"/>
-              </a:rPr>
-              <a:t>https://bluemarvel-backend.onrender.com/</a:t>
-            </a:r>
-            <a:endParaRPr lang="en-US" altLang="ko-KR" sz="1200" dirty="0">
-              <a:solidFill>
-                <a:prstClr val="black"/>
-              </a:solidFill>
-              <a:ea typeface="나눔스퀘어 네오 OTF Bold"/>
-            </a:endParaRPr>
-          </a:p>
-        </p:txBody>
-      </p:sp>
-      <p:sp>
-        <p:nvSpPr>
-          <p:cNvPr id="13" name="TextBox 12">
-            <a:extLst>
-              <a:ext uri="{FF2B5EF4-FFF2-40B4-BE49-F238E27FC236}">
-                <a16:creationId xmlns:a16="http://schemas.microsoft.com/office/drawing/2014/main" id="{7620B1D1-88C8-C3A1-A6AC-FB40657DA5CC}"/>
-              </a:ext>
-            </a:extLst>
-          </p:cNvPr>
-          <p:cNvSpPr txBox="1">
-            <a:spLocks noChangeAspect="1"/>
-          </p:cNvSpPr>
-          <p:nvPr/>
-        </p:nvSpPr>
-        <p:spPr>
-          <a:xfrm>
-            <a:off x="438664" y="912969"/>
-            <a:ext cx="1011815" cy="338554"/>
-          </a:xfrm>
-          <a:prstGeom prst="rect">
-            <a:avLst/>
-          </a:prstGeom>
-          <a:noFill/>
-          <a:ln>
-            <a:noFill/>
-          </a:ln>
-        </p:spPr>
-        <p:txBody>
-          <a:bodyPr wrap="none" rtlCol="0" anchor="ctr">
-            <a:spAutoFit/>
-          </a:bodyPr>
-          <a:lstStyle/>
-          <a:p>
-            <a:pPr defTabSz="457189" latinLnBrk="0"/>
-            <a:r>
-              <a:rPr lang="ko-KR" altLang="en-US" sz="1600" b="1" dirty="0">
-                <a:solidFill>
-                  <a:srgbClr val="002878"/>
-                </a:solidFill>
-                <a:latin typeface="나눔스퀘어 네오 OTF ExtraBold" panose="00000900000000000000" pitchFamily="50" charset="-127"/>
-                <a:ea typeface="나눔스퀘어 네오 OTF ExtraBold" panose="00000900000000000000" pitchFamily="50" charset="-127"/>
-              </a:rPr>
-              <a:t>시연 화면</a:t>
-            </a:r>
-            <a:endParaRPr lang="ko-KR" altLang="en-US" sz="1600" dirty="0">
-              <a:solidFill>
-                <a:srgbClr val="002060"/>
-              </a:solidFill>
-              <a:latin typeface="나눔스퀘어 네오 OTF ExtraBold" panose="00000900000000000000" pitchFamily="50" charset="-127"/>
-              <a:ea typeface="나눔스퀘어 네오 OTF ExtraBold" panose="00000900000000000000" pitchFamily="50" charset="-127"/>
-            </a:endParaRPr>
-          </a:p>
-        </p:txBody>
-      </p:sp>
-      <p:sp>
-        <p:nvSpPr>
-          <p:cNvPr id="15" name="직사각형 14">
-            <a:extLst>
-              <a:ext uri="{FF2B5EF4-FFF2-40B4-BE49-F238E27FC236}">
-                <a16:creationId xmlns:a16="http://schemas.microsoft.com/office/drawing/2014/main" id="{9449BDB6-062E-2CE3-F757-47E16E9475DE}"/>
-              </a:ext>
-            </a:extLst>
-          </p:cNvPr>
-          <p:cNvSpPr/>
-          <p:nvPr/>
-        </p:nvSpPr>
-        <p:spPr>
-          <a:xfrm>
-            <a:off x="396695" y="983247"/>
-            <a:ext cx="45719" cy="198000"/>
-          </a:xfrm>
-          <a:prstGeom prst="rect">
-            <a:avLst/>
-          </a:prstGeom>
-          <a:solidFill>
-            <a:schemeClr val="tx2"/>
-          </a:solidFill>
-          <a:ln>
-            <a:noFill/>
-          </a:ln>
-        </p:spPr>
-        <p:style>
-          <a:lnRef idx="2">
-            <a:schemeClr val="accent1">
-              <a:shade val="50000"/>
-            </a:schemeClr>
-          </a:lnRef>
-          <a:fillRef idx="1">
-            <a:schemeClr val="accent1"/>
-          </a:fillRef>
-          <a:effectRef idx="0">
-            <a:schemeClr val="accent1"/>
-          </a:effectRef>
-          <a:fontRef idx="minor">
-            <a:schemeClr val="lt1"/>
-          </a:fontRef>
-        </p:style>
-        <p:txBody>
-          <a:bodyPr rtlCol="0" anchor="ctr"/>
-          <a:lstStyle/>
-          <a:p>
-            <a:pPr algn="ctr" defTabSz="457189" latinLnBrk="0"/>
-            <a:endParaRPr lang="ko-KR" altLang="en-US" dirty="0">
-              <a:solidFill>
-                <a:prstClr val="black"/>
-              </a:solidFill>
-              <a:latin typeface="나눔스퀘어 네오 OTF Regular" panose="00000500000000000000" pitchFamily="50" charset="-127"/>
-              <a:ea typeface="나눔스퀘어 네오 OTF Regular" panose="00000500000000000000" pitchFamily="50" charset="-127"/>
-            </a:endParaRPr>
-          </a:p>
-        </p:txBody>
-      </p:sp>
       <p:pic>
         <p:nvPicPr>
-          <p:cNvPr id="10" name="그림 9">
-            <a:extLst>
-              <a:ext uri="{FF2B5EF4-FFF2-40B4-BE49-F238E27FC236}">
-                <a16:creationId xmlns:a16="http://schemas.microsoft.com/office/drawing/2014/main" id="{93D355CA-5F05-4D26-A3EA-71F81FA4F893}"/>
-              </a:ext>
-            </a:extLst>
-          </p:cNvPr>
-          <p:cNvPicPr>
-            <a:picLocks/>
-          </p:cNvPicPr>
-          <p:nvPr/>
-        </p:nvPicPr>
-        <p:blipFill rotWithShape="1">
-          <a:blip r:embed="rId4"/>
-          <a:srcRect l="1299" r="1505" b="1984"/>
-          <a:stretch/>
-        </p:blipFill>
-        <p:spPr>
-          <a:xfrm>
-            <a:off x="1364560" y="1815705"/>
-            <a:ext cx="2880000" cy="1080000"/>
-          </a:xfrm>
-          <a:prstGeom prst="rect">
-            <a:avLst/>
-          </a:prstGeom>
-        </p:spPr>
-      </p:pic>
-      <p:pic>
-        <p:nvPicPr>
-          <p:cNvPr id="5" name="그림 4">
-            <a:extLst>
-              <a:ext uri="{FF2B5EF4-FFF2-40B4-BE49-F238E27FC236}">
-                <a16:creationId xmlns:a16="http://schemas.microsoft.com/office/drawing/2014/main" id="{9D08E6B8-6FC5-4BF2-A2CF-12CB7C026CEC}"/>
-              </a:ext>
-            </a:extLst>
-          </p:cNvPr>
-          <p:cNvPicPr>
-            <a:picLocks/>
-          </p:cNvPicPr>
-          <p:nvPr/>
-        </p:nvPicPr>
-        <p:blipFill rotWithShape="1">
-          <a:blip r:embed="rId5"/>
-          <a:srcRect l="1299" t="-1" r="1420" b="3703"/>
-          <a:stretch/>
-        </p:blipFill>
-        <p:spPr>
-          <a:xfrm>
-            <a:off x="1364560" y="3420362"/>
-            <a:ext cx="2880000" cy="1080000"/>
-          </a:xfrm>
-          <a:prstGeom prst="rect">
-            <a:avLst/>
-          </a:prstGeom>
-        </p:spPr>
-      </p:pic>
-      <p:pic>
-        <p:nvPicPr>
-          <p:cNvPr id="9" name="그림 8">
-            <a:extLst>
-              <a:ext uri="{FF2B5EF4-FFF2-40B4-BE49-F238E27FC236}">
-                <a16:creationId xmlns:a16="http://schemas.microsoft.com/office/drawing/2014/main" id="{0368F648-6BB4-45FB-8750-B23033DF1761}"/>
+          <p:cNvPr id="30" name="그림 29">
+            <a:extLst>
+              <a:ext uri="{FF2B5EF4-FFF2-40B4-BE49-F238E27FC236}">
+                <a16:creationId xmlns:a16="http://schemas.microsoft.com/office/drawing/2014/main" id="{4012BA36-0A81-4A42-8608-CB0696C3633C}"/>
               </a:ext>
             </a:extLst>
           </p:cNvPr>
@@ -18212,1089 +19188,23 @@
         </p:nvPicPr>
         <p:blipFill rotWithShape="1">
           <a:blip r:embed="rId6"/>
-          <a:srcRect l="1039" r="914" b="2714"/>
+          <a:srcRect l="1193" t="5489" r="712" b="2822"/>
           <a:stretch/>
         </p:blipFill>
         <p:spPr>
           <a:xfrm>
-            <a:off x="4899440" y="1815705"/>
-            <a:ext cx="2880000" cy="1080000"/>
+            <a:off x="5949455" y="3667681"/>
+            <a:ext cx="2841476" cy="1012351"/>
           </a:xfrm>
           <a:prstGeom prst="rect">
             <a:avLst/>
           </a:prstGeom>
         </p:spPr>
       </p:pic>
-      <p:pic>
-        <p:nvPicPr>
-          <p:cNvPr id="34" name="그림 33">
-            <a:extLst>
-              <a:ext uri="{FF2B5EF4-FFF2-40B4-BE49-F238E27FC236}">
-                <a16:creationId xmlns:a16="http://schemas.microsoft.com/office/drawing/2014/main" id="{9EC59D6D-6890-471C-B30B-8F61C4968E1C}"/>
-              </a:ext>
-            </a:extLst>
-          </p:cNvPr>
-          <p:cNvPicPr>
-            <a:picLocks/>
-          </p:cNvPicPr>
-          <p:nvPr/>
-        </p:nvPicPr>
-        <p:blipFill rotWithShape="1">
-          <a:blip r:embed="rId7"/>
-          <a:srcRect l="201" r="1334" b="1861"/>
-          <a:stretch/>
-        </p:blipFill>
-        <p:spPr>
-          <a:xfrm>
-            <a:off x="1321602" y="5040362"/>
-            <a:ext cx="2880000" cy="1080000"/>
-          </a:xfrm>
-          <a:prstGeom prst="rect">
-            <a:avLst/>
-          </a:prstGeom>
-        </p:spPr>
-      </p:pic>
-      <p:sp>
-        <p:nvSpPr>
-          <p:cNvPr id="35" name="TextBox 34">
-            <a:extLst>
-              <a:ext uri="{FF2B5EF4-FFF2-40B4-BE49-F238E27FC236}">
-                <a16:creationId xmlns:a16="http://schemas.microsoft.com/office/drawing/2014/main" id="{2E7E23A1-246D-46F7-B3D4-F7934E9E0F6A}"/>
-              </a:ext>
-            </a:extLst>
-          </p:cNvPr>
-          <p:cNvSpPr txBox="1">
-            <a:spLocks noChangeAspect="1"/>
-          </p:cNvSpPr>
-          <p:nvPr/>
-        </p:nvSpPr>
-        <p:spPr>
-          <a:xfrm>
-            <a:off x="1321602" y="2895705"/>
-            <a:ext cx="2922958" cy="275075"/>
-          </a:xfrm>
-          <a:prstGeom prst="rect">
-            <a:avLst/>
-          </a:prstGeom>
-          <a:noFill/>
-        </p:spPr>
-        <p:txBody>
-          <a:bodyPr wrap="square" rtlCol="0">
-            <a:spAutoFit/>
-          </a:bodyPr>
-          <a:lstStyle/>
-          <a:p>
-            <a:pPr marL="144000" lvl="1" indent="-144000" defTabSz="914400" latinLnBrk="1">
-              <a:lnSpc>
-                <a:spcPct val="120000"/>
-              </a:lnSpc>
-              <a:spcBef>
-                <a:spcPts val="500"/>
-              </a:spcBef>
-              <a:spcAft>
-                <a:spcPts val="300"/>
-              </a:spcAft>
-              <a:buFont typeface="Wingdings" panose="05000000000000000000" pitchFamily="2" charset="2"/>
-              <a:buChar char="§"/>
-              <a:defRPr/>
-            </a:pPr>
-            <a:r>
-              <a:rPr lang="ko-KR" altLang="en-US" sz="1050" dirty="0">
-                <a:latin typeface="나눔스퀘어 네오 OTF Regular" panose="00000500000000000000" pitchFamily="50" charset="-127"/>
-                <a:ea typeface="나눔스퀘어 네오 OTF Regular" panose="00000500000000000000" pitchFamily="50" charset="-127"/>
-              </a:rPr>
-              <a:t>토지 구매</a:t>
-            </a:r>
-            <a:endParaRPr lang="en-US" altLang="ko-KR" sz="1050" dirty="0">
-              <a:latin typeface="나눔스퀘어 네오 OTF Regular" panose="00000500000000000000" pitchFamily="50" charset="-127"/>
-              <a:ea typeface="나눔스퀘어 네오 OTF Regular" panose="00000500000000000000" pitchFamily="50" charset="-127"/>
-            </a:endParaRPr>
-          </a:p>
-        </p:txBody>
-      </p:sp>
-      <p:sp>
-        <p:nvSpPr>
-          <p:cNvPr id="36" name="TextBox 35">
-            <a:extLst>
-              <a:ext uri="{FF2B5EF4-FFF2-40B4-BE49-F238E27FC236}">
-                <a16:creationId xmlns:a16="http://schemas.microsoft.com/office/drawing/2014/main" id="{A5C0C133-3FE4-4DA8-ABE5-1BD4C45BF535}"/>
-              </a:ext>
-            </a:extLst>
-          </p:cNvPr>
-          <p:cNvSpPr txBox="1">
-            <a:spLocks noChangeAspect="1"/>
-          </p:cNvSpPr>
-          <p:nvPr/>
-        </p:nvSpPr>
-        <p:spPr>
-          <a:xfrm>
-            <a:off x="1321602" y="4500362"/>
-            <a:ext cx="2922958" cy="275075"/>
-          </a:xfrm>
-          <a:prstGeom prst="rect">
-            <a:avLst/>
-          </a:prstGeom>
-          <a:noFill/>
-        </p:spPr>
-        <p:txBody>
-          <a:bodyPr wrap="square" rtlCol="0">
-            <a:spAutoFit/>
-          </a:bodyPr>
-          <a:lstStyle/>
-          <a:p>
-            <a:pPr marL="144000" lvl="1" indent="-144000" defTabSz="914400" latinLnBrk="1">
-              <a:lnSpc>
-                <a:spcPct val="120000"/>
-              </a:lnSpc>
-              <a:spcBef>
-                <a:spcPts val="500"/>
-              </a:spcBef>
-              <a:spcAft>
-                <a:spcPts val="300"/>
-              </a:spcAft>
-              <a:buFont typeface="Wingdings" panose="05000000000000000000" pitchFamily="2" charset="2"/>
-              <a:buChar char="§"/>
-              <a:defRPr/>
-            </a:pPr>
-            <a:r>
-              <a:rPr lang="ko-KR" altLang="en-US" sz="1050" dirty="0">
-                <a:latin typeface="나눔스퀘어 네오 OTF Regular" panose="00000500000000000000" pitchFamily="50" charset="-127"/>
-                <a:ea typeface="나눔스퀘어 네오 OTF Regular" panose="00000500000000000000" pitchFamily="50" charset="-127"/>
-              </a:rPr>
-              <a:t>토지 구매 성공</a:t>
-            </a:r>
-            <a:endParaRPr lang="en-US" altLang="ko-KR" sz="1050" dirty="0">
-              <a:latin typeface="나눔스퀘어 네오 OTF Regular" panose="00000500000000000000" pitchFamily="50" charset="-127"/>
-              <a:ea typeface="나눔스퀘어 네오 OTF Regular" panose="00000500000000000000" pitchFamily="50" charset="-127"/>
-            </a:endParaRPr>
-          </a:p>
-        </p:txBody>
-      </p:sp>
-      <p:sp>
-        <p:nvSpPr>
-          <p:cNvPr id="37" name="TextBox 36">
-            <a:extLst>
-              <a:ext uri="{FF2B5EF4-FFF2-40B4-BE49-F238E27FC236}">
-                <a16:creationId xmlns:a16="http://schemas.microsoft.com/office/drawing/2014/main" id="{32402A0D-2DAE-4A59-8D96-96DA92899F3D}"/>
-              </a:ext>
-            </a:extLst>
-          </p:cNvPr>
-          <p:cNvSpPr txBox="1">
-            <a:spLocks noChangeAspect="1"/>
-          </p:cNvSpPr>
-          <p:nvPr/>
-        </p:nvSpPr>
-        <p:spPr>
-          <a:xfrm>
-            <a:off x="1321602" y="6120362"/>
-            <a:ext cx="2922958" cy="275075"/>
-          </a:xfrm>
-          <a:prstGeom prst="rect">
-            <a:avLst/>
-          </a:prstGeom>
-          <a:noFill/>
-        </p:spPr>
-        <p:txBody>
-          <a:bodyPr wrap="square" rtlCol="0">
-            <a:spAutoFit/>
-          </a:bodyPr>
-          <a:lstStyle/>
-          <a:p>
-            <a:pPr marL="144000" lvl="1" indent="-144000" defTabSz="914400" latinLnBrk="1">
-              <a:lnSpc>
-                <a:spcPct val="120000"/>
-              </a:lnSpc>
-              <a:spcBef>
-                <a:spcPts val="500"/>
-              </a:spcBef>
-              <a:spcAft>
-                <a:spcPts val="300"/>
-              </a:spcAft>
-              <a:buFont typeface="Wingdings" panose="05000000000000000000" pitchFamily="2" charset="2"/>
-              <a:buChar char="§"/>
-              <a:defRPr/>
-            </a:pPr>
-            <a:r>
-              <a:rPr lang="ko-KR" altLang="en-US" sz="1050" dirty="0">
-                <a:latin typeface="나눔스퀘어 네오 OTF Regular" panose="00000500000000000000" pitchFamily="50" charset="-127"/>
-                <a:ea typeface="나눔스퀘어 네오 OTF Regular" panose="00000500000000000000" pitchFamily="50" charset="-127"/>
-              </a:rPr>
-              <a:t>토지 구매 실패 </a:t>
-            </a:r>
-            <a:r>
-              <a:rPr lang="en-US" altLang="ko-KR" sz="1050" dirty="0">
-                <a:latin typeface="나눔스퀘어 네오 OTF Regular" panose="00000500000000000000" pitchFamily="50" charset="-127"/>
-                <a:ea typeface="나눔스퀘어 네오 OTF Regular" panose="00000500000000000000" pitchFamily="50" charset="-127"/>
-              </a:rPr>
-              <a:t>(</a:t>
-            </a:r>
-            <a:r>
-              <a:rPr lang="ko-KR" altLang="en-US" sz="1050" dirty="0">
-                <a:latin typeface="나눔스퀘어 네오 OTF Regular" panose="00000500000000000000" pitchFamily="50" charset="-127"/>
-                <a:ea typeface="나눔스퀘어 네오 OTF Regular" panose="00000500000000000000" pitchFamily="50" charset="-127"/>
-              </a:rPr>
-              <a:t>잔액 부족</a:t>
-            </a:r>
-            <a:r>
-              <a:rPr lang="en-US" altLang="ko-KR" sz="1050" dirty="0">
-                <a:latin typeface="나눔스퀘어 네오 OTF Regular" panose="00000500000000000000" pitchFamily="50" charset="-127"/>
-                <a:ea typeface="나눔스퀘어 네오 OTF Regular" panose="00000500000000000000" pitchFamily="50" charset="-127"/>
-              </a:rPr>
-              <a:t>)</a:t>
-            </a:r>
-          </a:p>
-        </p:txBody>
-      </p:sp>
     </p:spTree>
     <p:extLst>
       <p:ext uri="{BB962C8B-B14F-4D97-AF65-F5344CB8AC3E}">
-        <p14:creationId xmlns:p14="http://schemas.microsoft.com/office/powerpoint/2010/main" val="2373029213"/>
-      </p:ext>
-    </p:extLst>
-  </p:cSld>
-  <p:clrMapOvr>
-    <a:masterClrMapping/>
-  </p:clrMapOvr>
-</p:sld>
-</file>
-
-<file path=ppt/slides/slide5.xml><?xml version="1.0" encoding="utf-8"?>
-<p:sld xmlns:a="http://schemas.openxmlformats.org/drawingml/2006/main" xmlns:r="http://schemas.openxmlformats.org/officeDocument/2006/relationships" xmlns:p="http://schemas.openxmlformats.org/presentationml/2006/main">
-  <p:cSld>
-    <p:spTree>
-      <p:nvGrpSpPr>
-        <p:cNvPr id="1" name=""/>
-        <p:cNvGrpSpPr/>
-        <p:nvPr/>
-      </p:nvGrpSpPr>
-      <p:grpSpPr>
-        <a:xfrm>
-          <a:off x="0" y="0"/>
-          <a:ext cx="0" cy="0"/>
-          <a:chOff x="0" y="0"/>
-          <a:chExt cx="0" cy="0"/>
-        </a:xfrm>
-      </p:grpSpPr>
-      <p:sp>
-        <p:nvSpPr>
-          <p:cNvPr id="2" name="제목 1">
-            <a:extLst>
-              <a:ext uri="{FF2B5EF4-FFF2-40B4-BE49-F238E27FC236}">
-                <a16:creationId xmlns:a16="http://schemas.microsoft.com/office/drawing/2014/main" id="{669222B5-D6F0-4947-B246-583D90317449}"/>
-              </a:ext>
-            </a:extLst>
-          </p:cNvPr>
-          <p:cNvSpPr>
-            <a:spLocks noGrp="1"/>
-          </p:cNvSpPr>
-          <p:nvPr>
-            <p:ph type="title"/>
-          </p:nvPr>
-        </p:nvSpPr>
-        <p:spPr/>
-        <p:txBody>
-          <a:bodyPr/>
-          <a:lstStyle/>
-          <a:p>
-            <a:r>
-              <a:rPr kumimoji="1" lang="en-US" altLang="en-US" b="1" dirty="0"/>
-              <a:t>Rust</a:t>
-            </a:r>
-            <a:r>
-              <a:rPr kumimoji="1" lang="ko-KR" altLang="en-US" b="1" dirty="0"/>
-              <a:t> 코드 기반 테스트를 위한 개발 프로젝트</a:t>
-            </a:r>
-            <a:endParaRPr kumimoji="1" lang="x-none" altLang="en-US" b="1" dirty="0"/>
-          </a:p>
-        </p:txBody>
-      </p:sp>
-      <p:sp>
-        <p:nvSpPr>
-          <p:cNvPr id="3" name="슬라이드 번호 개체 틀 2"/>
-          <p:cNvSpPr>
-            <a:spLocks noGrp="1"/>
-          </p:cNvSpPr>
-          <p:nvPr>
-            <p:ph type="sldNum" sz="quarter" idx="12"/>
-          </p:nvPr>
-        </p:nvSpPr>
-        <p:spPr/>
-        <p:txBody>
-          <a:bodyPr/>
-          <a:lstStyle/>
-          <a:p>
-            <a:pPr defTabSz="457189" latinLnBrk="0"/>
-            <a:fld id="{369BBEF4-35F7-054D-BCC4-3F145CEF9DF2}" type="slidenum">
-              <a:rPr kumimoji="1" lang="x-none" altLang="en-US">
-                <a:solidFill>
-                  <a:prstClr val="black"/>
-                </a:solidFill>
-                <a:ea typeface="나눔스퀘어 네오 OTF Bold"/>
-              </a:rPr>
-              <a:pPr defTabSz="457189" latinLnBrk="0"/>
-              <a:t>5</a:t>
-            </a:fld>
-            <a:endParaRPr kumimoji="1" lang="x-none" altLang="en-US">
-              <a:solidFill>
-                <a:prstClr val="black"/>
-              </a:solidFill>
-              <a:ea typeface="나눔스퀘어 네오 OTF Bold"/>
-            </a:endParaRPr>
-          </a:p>
-        </p:txBody>
-      </p:sp>
-      <p:sp>
-        <p:nvSpPr>
-          <p:cNvPr id="7" name="TextBox 6">
-            <a:extLst>
-              <a:ext uri="{FF2B5EF4-FFF2-40B4-BE49-F238E27FC236}">
-                <a16:creationId xmlns:a16="http://schemas.microsoft.com/office/drawing/2014/main" id="{3B4A1112-C52D-79DD-E60E-0B980867FE5A}"/>
-              </a:ext>
-            </a:extLst>
-          </p:cNvPr>
-          <p:cNvSpPr txBox="1">
-            <a:spLocks noChangeAspect="1"/>
-          </p:cNvSpPr>
-          <p:nvPr/>
-        </p:nvSpPr>
-        <p:spPr>
-          <a:xfrm>
-            <a:off x="438662" y="1316954"/>
-            <a:ext cx="8264569" cy="301173"/>
-          </a:xfrm>
-          <a:prstGeom prst="rect">
-            <a:avLst/>
-          </a:prstGeom>
-          <a:noFill/>
-        </p:spPr>
-        <p:txBody>
-          <a:bodyPr wrap="square" rtlCol="0">
-            <a:spAutoFit/>
-          </a:bodyPr>
-          <a:lstStyle/>
-          <a:p>
-            <a:pPr marL="143996" lvl="1" indent="-143996">
-              <a:lnSpc>
-                <a:spcPct val="120000"/>
-              </a:lnSpc>
-              <a:spcBef>
-                <a:spcPts val="600"/>
-              </a:spcBef>
-              <a:spcAft>
-                <a:spcPts val="400"/>
-              </a:spcAft>
-              <a:buFont typeface="Wingdings" panose="05000000000000000000" pitchFamily="2" charset="2"/>
-              <a:buChar char="§"/>
-              <a:defRPr/>
-            </a:pPr>
-            <a:r>
-              <a:rPr lang="en-US" altLang="ko-KR" sz="1200" dirty="0">
-                <a:solidFill>
-                  <a:prstClr val="black"/>
-                </a:solidFill>
-                <a:ea typeface="나눔스퀘어 네오 OTF Bold"/>
-                <a:hlinkClick r:id="rId3"/>
-              </a:rPr>
-              <a:t>https://bluemarvel-backend.onrender.com/</a:t>
-            </a:r>
-            <a:endParaRPr lang="en-US" altLang="ko-KR" sz="1200" dirty="0">
-              <a:solidFill>
-                <a:prstClr val="black"/>
-              </a:solidFill>
-              <a:ea typeface="나눔스퀘어 네오 OTF Bold"/>
-            </a:endParaRPr>
-          </a:p>
-        </p:txBody>
-      </p:sp>
-      <p:sp>
-        <p:nvSpPr>
-          <p:cNvPr id="13" name="TextBox 12">
-            <a:extLst>
-              <a:ext uri="{FF2B5EF4-FFF2-40B4-BE49-F238E27FC236}">
-                <a16:creationId xmlns:a16="http://schemas.microsoft.com/office/drawing/2014/main" id="{7620B1D1-88C8-C3A1-A6AC-FB40657DA5CC}"/>
-              </a:ext>
-            </a:extLst>
-          </p:cNvPr>
-          <p:cNvSpPr txBox="1">
-            <a:spLocks noChangeAspect="1"/>
-          </p:cNvSpPr>
-          <p:nvPr/>
-        </p:nvSpPr>
-        <p:spPr>
-          <a:xfrm>
-            <a:off x="438664" y="912969"/>
-            <a:ext cx="1011815" cy="338554"/>
-          </a:xfrm>
-          <a:prstGeom prst="rect">
-            <a:avLst/>
-          </a:prstGeom>
-          <a:noFill/>
-          <a:ln>
-            <a:noFill/>
-          </a:ln>
-        </p:spPr>
-        <p:txBody>
-          <a:bodyPr wrap="none" rtlCol="0" anchor="ctr">
-            <a:spAutoFit/>
-          </a:bodyPr>
-          <a:lstStyle/>
-          <a:p>
-            <a:pPr defTabSz="457189" latinLnBrk="0"/>
-            <a:r>
-              <a:rPr lang="ko-KR" altLang="en-US" sz="1600" b="1" dirty="0">
-                <a:solidFill>
-                  <a:srgbClr val="002878"/>
-                </a:solidFill>
-                <a:latin typeface="나눔스퀘어 네오 OTF ExtraBold" panose="00000900000000000000" pitchFamily="50" charset="-127"/>
-                <a:ea typeface="나눔스퀘어 네오 OTF ExtraBold" panose="00000900000000000000" pitchFamily="50" charset="-127"/>
-              </a:rPr>
-              <a:t>시연 화면</a:t>
-            </a:r>
-            <a:endParaRPr lang="ko-KR" altLang="en-US" sz="1600" dirty="0">
-              <a:solidFill>
-                <a:srgbClr val="002060"/>
-              </a:solidFill>
-              <a:latin typeface="나눔스퀘어 네오 OTF ExtraBold" panose="00000900000000000000" pitchFamily="50" charset="-127"/>
-              <a:ea typeface="나눔스퀘어 네오 OTF ExtraBold" panose="00000900000000000000" pitchFamily="50" charset="-127"/>
-            </a:endParaRPr>
-          </a:p>
-        </p:txBody>
-      </p:sp>
-      <p:sp>
-        <p:nvSpPr>
-          <p:cNvPr id="15" name="직사각형 14">
-            <a:extLst>
-              <a:ext uri="{FF2B5EF4-FFF2-40B4-BE49-F238E27FC236}">
-                <a16:creationId xmlns:a16="http://schemas.microsoft.com/office/drawing/2014/main" id="{9449BDB6-062E-2CE3-F757-47E16E9475DE}"/>
-              </a:ext>
-            </a:extLst>
-          </p:cNvPr>
-          <p:cNvSpPr/>
-          <p:nvPr/>
-        </p:nvSpPr>
-        <p:spPr>
-          <a:xfrm>
-            <a:off x="396695" y="983247"/>
-            <a:ext cx="45719" cy="198000"/>
-          </a:xfrm>
-          <a:prstGeom prst="rect">
-            <a:avLst/>
-          </a:prstGeom>
-          <a:solidFill>
-            <a:schemeClr val="tx2"/>
-          </a:solidFill>
-          <a:ln>
-            <a:noFill/>
-          </a:ln>
-        </p:spPr>
-        <p:style>
-          <a:lnRef idx="2">
-            <a:schemeClr val="accent1">
-              <a:shade val="50000"/>
-            </a:schemeClr>
-          </a:lnRef>
-          <a:fillRef idx="1">
-            <a:schemeClr val="accent1"/>
-          </a:fillRef>
-          <a:effectRef idx="0">
-            <a:schemeClr val="accent1"/>
-          </a:effectRef>
-          <a:fontRef idx="minor">
-            <a:schemeClr val="lt1"/>
-          </a:fontRef>
-        </p:style>
-        <p:txBody>
-          <a:bodyPr rtlCol="0" anchor="ctr"/>
-          <a:lstStyle/>
-          <a:p>
-            <a:pPr algn="ctr" defTabSz="457189" latinLnBrk="0"/>
-            <a:endParaRPr lang="ko-KR" altLang="en-US" dirty="0">
-              <a:solidFill>
-                <a:prstClr val="black"/>
-              </a:solidFill>
-              <a:latin typeface="나눔스퀘어 네오 OTF Regular" panose="00000500000000000000" pitchFamily="50" charset="-127"/>
-              <a:ea typeface="나눔스퀘어 네오 OTF Regular" panose="00000500000000000000" pitchFamily="50" charset="-127"/>
-            </a:endParaRPr>
-          </a:p>
-        </p:txBody>
-      </p:sp>
-      <p:pic>
-        <p:nvPicPr>
-          <p:cNvPr id="28" name="그림 27">
-            <a:extLst>
-              <a:ext uri="{FF2B5EF4-FFF2-40B4-BE49-F238E27FC236}">
-                <a16:creationId xmlns:a16="http://schemas.microsoft.com/office/drawing/2014/main" id="{3E68A033-915E-483B-8D6B-1F4D44A56A1D}"/>
-              </a:ext>
-            </a:extLst>
-          </p:cNvPr>
-          <p:cNvPicPr>
-            <a:picLocks noChangeAspect="1"/>
-          </p:cNvPicPr>
-          <p:nvPr/>
-        </p:nvPicPr>
-        <p:blipFill rotWithShape="1">
-          <a:blip r:embed="rId4"/>
-          <a:srcRect l="926" r="1393"/>
-          <a:stretch/>
-        </p:blipFill>
-        <p:spPr>
-          <a:xfrm>
-            <a:off x="1331275" y="1715388"/>
-            <a:ext cx="2880000" cy="980637"/>
-          </a:xfrm>
-          <a:prstGeom prst="rect">
-            <a:avLst/>
-          </a:prstGeom>
-        </p:spPr>
-      </p:pic>
-      <p:pic>
-        <p:nvPicPr>
-          <p:cNvPr id="30" name="그림 29">
-            <a:extLst>
-              <a:ext uri="{FF2B5EF4-FFF2-40B4-BE49-F238E27FC236}">
-                <a16:creationId xmlns:a16="http://schemas.microsoft.com/office/drawing/2014/main" id="{8C38776A-6014-49CF-BACF-F53FD428B816}"/>
-              </a:ext>
-            </a:extLst>
-          </p:cNvPr>
-          <p:cNvPicPr>
-            <a:picLocks/>
-          </p:cNvPicPr>
-          <p:nvPr/>
-        </p:nvPicPr>
-        <p:blipFill rotWithShape="1">
-          <a:blip r:embed="rId5"/>
-          <a:srcRect l="1104" r="943"/>
-          <a:stretch/>
-        </p:blipFill>
-        <p:spPr>
-          <a:xfrm>
-            <a:off x="4860434" y="4931178"/>
-            <a:ext cx="2880000" cy="1080000"/>
-          </a:xfrm>
-          <a:prstGeom prst="rect">
-            <a:avLst/>
-          </a:prstGeom>
-        </p:spPr>
-      </p:pic>
-      <p:pic>
-        <p:nvPicPr>
-          <p:cNvPr id="32" name="그림 31">
-            <a:extLst>
-              <a:ext uri="{FF2B5EF4-FFF2-40B4-BE49-F238E27FC236}">
-                <a16:creationId xmlns:a16="http://schemas.microsoft.com/office/drawing/2014/main" id="{37063EAA-B016-4D0D-A013-6AF3B632B568}"/>
-              </a:ext>
-            </a:extLst>
-          </p:cNvPr>
-          <p:cNvPicPr>
-            <a:picLocks/>
-          </p:cNvPicPr>
-          <p:nvPr/>
-        </p:nvPicPr>
-        <p:blipFill>
-          <a:blip r:embed="rId6"/>
-          <a:stretch>
-            <a:fillRect/>
-          </a:stretch>
-        </p:blipFill>
-        <p:spPr>
-          <a:xfrm>
-            <a:off x="1331275" y="4876496"/>
-            <a:ext cx="2880000" cy="1080000"/>
-          </a:xfrm>
-          <a:prstGeom prst="rect">
-            <a:avLst/>
-          </a:prstGeom>
-        </p:spPr>
-      </p:pic>
-      <p:pic>
-        <p:nvPicPr>
-          <p:cNvPr id="6" name="그림 5">
-            <a:extLst>
-              <a:ext uri="{FF2B5EF4-FFF2-40B4-BE49-F238E27FC236}">
-                <a16:creationId xmlns:a16="http://schemas.microsoft.com/office/drawing/2014/main" id="{805543AB-7EB5-47E8-ADF1-3EABFEB4707B}"/>
-              </a:ext>
-            </a:extLst>
-          </p:cNvPr>
-          <p:cNvPicPr>
-            <a:picLocks/>
-          </p:cNvPicPr>
-          <p:nvPr/>
-        </p:nvPicPr>
-        <p:blipFill rotWithShape="1">
-          <a:blip r:embed="rId7"/>
-          <a:srcRect l="314" r="783"/>
-          <a:stretch/>
-        </p:blipFill>
-        <p:spPr>
-          <a:xfrm>
-            <a:off x="4860434" y="1715388"/>
-            <a:ext cx="2880000" cy="1080000"/>
-          </a:xfrm>
-          <a:prstGeom prst="rect">
-            <a:avLst/>
-          </a:prstGeom>
-        </p:spPr>
-      </p:pic>
-      <p:pic>
-        <p:nvPicPr>
-          <p:cNvPr id="11" name="그림 10">
-            <a:extLst>
-              <a:ext uri="{FF2B5EF4-FFF2-40B4-BE49-F238E27FC236}">
-                <a16:creationId xmlns:a16="http://schemas.microsoft.com/office/drawing/2014/main" id="{7A2BB3A4-AD79-4B99-9CEB-5645B7A6E63E}"/>
-              </a:ext>
-            </a:extLst>
-          </p:cNvPr>
-          <p:cNvPicPr>
-            <a:picLocks/>
-          </p:cNvPicPr>
-          <p:nvPr/>
-        </p:nvPicPr>
-        <p:blipFill rotWithShape="1">
-          <a:blip r:embed="rId8"/>
-          <a:srcRect l="127" r="447" b="2061"/>
-          <a:stretch/>
-        </p:blipFill>
-        <p:spPr>
-          <a:xfrm>
-            <a:off x="1331275" y="3422386"/>
-            <a:ext cx="2880000" cy="1081371"/>
-          </a:xfrm>
-          <a:prstGeom prst="rect">
-            <a:avLst/>
-          </a:prstGeom>
-        </p:spPr>
-      </p:pic>
-      <p:pic>
-        <p:nvPicPr>
-          <p:cNvPr id="14" name="그림 13">
-            <a:extLst>
-              <a:ext uri="{FF2B5EF4-FFF2-40B4-BE49-F238E27FC236}">
-                <a16:creationId xmlns:a16="http://schemas.microsoft.com/office/drawing/2014/main" id="{1235946A-A8E7-4F41-8C20-9D600F38C535}"/>
-              </a:ext>
-            </a:extLst>
-          </p:cNvPr>
-          <p:cNvPicPr>
-            <a:picLocks/>
-          </p:cNvPicPr>
-          <p:nvPr/>
-        </p:nvPicPr>
-        <p:blipFill>
-          <a:blip r:embed="rId9"/>
-          <a:stretch>
-            <a:fillRect/>
-          </a:stretch>
-        </p:blipFill>
-        <p:spPr>
-          <a:xfrm>
-            <a:off x="4860434" y="3323283"/>
-            <a:ext cx="2880000" cy="1080000"/>
-          </a:xfrm>
-          <a:prstGeom prst="rect">
-            <a:avLst/>
-          </a:prstGeom>
-        </p:spPr>
-      </p:pic>
-      <p:sp>
-        <p:nvSpPr>
-          <p:cNvPr id="20" name="TextBox 19">
-            <a:extLst>
-              <a:ext uri="{FF2B5EF4-FFF2-40B4-BE49-F238E27FC236}">
-                <a16:creationId xmlns:a16="http://schemas.microsoft.com/office/drawing/2014/main" id="{7AA95490-D508-445A-B6C1-C9E350400134}"/>
-              </a:ext>
-            </a:extLst>
-          </p:cNvPr>
-          <p:cNvSpPr txBox="1">
-            <a:spLocks noChangeAspect="1"/>
-          </p:cNvSpPr>
-          <p:nvPr/>
-        </p:nvSpPr>
-        <p:spPr>
-          <a:xfrm>
-            <a:off x="1289308" y="4503757"/>
-            <a:ext cx="2994258" cy="275075"/>
-          </a:xfrm>
-          <a:prstGeom prst="rect">
-            <a:avLst/>
-          </a:prstGeom>
-          <a:noFill/>
-        </p:spPr>
-        <p:txBody>
-          <a:bodyPr wrap="square" rtlCol="0">
-            <a:spAutoFit/>
-          </a:bodyPr>
-          <a:lstStyle/>
-          <a:p>
-            <a:pPr marL="144000" lvl="1" indent="-144000" defTabSz="914400" latinLnBrk="1">
-              <a:lnSpc>
-                <a:spcPct val="120000"/>
-              </a:lnSpc>
-              <a:spcBef>
-                <a:spcPts val="500"/>
-              </a:spcBef>
-              <a:spcAft>
-                <a:spcPts val="300"/>
-              </a:spcAft>
-              <a:buFont typeface="Wingdings" panose="05000000000000000000" pitchFamily="2" charset="2"/>
-              <a:buChar char="§"/>
-              <a:defRPr/>
-            </a:pPr>
-            <a:r>
-              <a:rPr lang="ko-KR" altLang="en-US" sz="1050" dirty="0">
-                <a:latin typeface="나눔스퀘어 네오 OTF Regular" panose="00000500000000000000" pitchFamily="50" charset="-127"/>
-                <a:ea typeface="나눔스퀘어 네오 OTF Regular" panose="00000500000000000000" pitchFamily="50" charset="-127"/>
-              </a:rPr>
-              <a:t>부동산세금 납부</a:t>
-            </a:r>
-            <a:endParaRPr lang="en-US" altLang="ko-KR" sz="1050" dirty="0">
-              <a:latin typeface="나눔스퀘어 네오 OTF Regular" panose="00000500000000000000" pitchFamily="50" charset="-127"/>
-              <a:ea typeface="나눔스퀘어 네오 OTF Regular" panose="00000500000000000000" pitchFamily="50" charset="-127"/>
-            </a:endParaRPr>
-          </a:p>
-        </p:txBody>
-      </p:sp>
-      <p:sp>
-        <p:nvSpPr>
-          <p:cNvPr id="21" name="TextBox 20">
-            <a:extLst>
-              <a:ext uri="{FF2B5EF4-FFF2-40B4-BE49-F238E27FC236}">
-                <a16:creationId xmlns:a16="http://schemas.microsoft.com/office/drawing/2014/main" id="{1BE5388C-03B1-4CB1-8BE4-51BC31AE9989}"/>
-              </a:ext>
-            </a:extLst>
-          </p:cNvPr>
-          <p:cNvSpPr txBox="1">
-            <a:spLocks noChangeAspect="1"/>
-          </p:cNvSpPr>
-          <p:nvPr/>
-        </p:nvSpPr>
-        <p:spPr>
-          <a:xfrm>
-            <a:off x="1312167" y="2698498"/>
-            <a:ext cx="2994258" cy="275075"/>
-          </a:xfrm>
-          <a:prstGeom prst="rect">
-            <a:avLst/>
-          </a:prstGeom>
-          <a:noFill/>
-        </p:spPr>
-        <p:txBody>
-          <a:bodyPr wrap="square" rtlCol="0">
-            <a:spAutoFit/>
-          </a:bodyPr>
-          <a:lstStyle/>
-          <a:p>
-            <a:pPr marL="144000" lvl="1" indent="-144000" defTabSz="914400" latinLnBrk="1">
-              <a:lnSpc>
-                <a:spcPct val="120000"/>
-              </a:lnSpc>
-              <a:spcBef>
-                <a:spcPts val="500"/>
-              </a:spcBef>
-              <a:spcAft>
-                <a:spcPts val="300"/>
-              </a:spcAft>
-              <a:buFont typeface="Wingdings" panose="05000000000000000000" pitchFamily="2" charset="2"/>
-              <a:buChar char="§"/>
-              <a:defRPr/>
-            </a:pPr>
-            <a:r>
-              <a:rPr lang="ko-KR" altLang="en-US" sz="1050" dirty="0">
-                <a:latin typeface="나눔스퀘어 네오 OTF Regular" panose="00000500000000000000" pitchFamily="50" charset="-127"/>
-                <a:ea typeface="나눔스퀘어 네오 OTF Regular" panose="00000500000000000000" pitchFamily="50" charset="-127"/>
-              </a:rPr>
-              <a:t>한 바퀴 당</a:t>
-            </a:r>
-            <a:r>
-              <a:rPr lang="en-US" altLang="ko-KR" sz="1050" dirty="0">
-                <a:latin typeface="나눔스퀘어 네오 OTF Regular" panose="00000500000000000000" pitchFamily="50" charset="-127"/>
-                <a:ea typeface="나눔스퀘어 네오 OTF Regular" panose="00000500000000000000" pitchFamily="50" charset="-127"/>
-              </a:rPr>
-              <a:t>, </a:t>
-            </a:r>
-            <a:r>
-              <a:rPr lang="ko-KR" altLang="en-US" sz="1050" dirty="0">
-                <a:latin typeface="나눔스퀘어 네오 OTF Regular" panose="00000500000000000000" pitchFamily="50" charset="-127"/>
-                <a:ea typeface="나눔스퀘어 네오 OTF Regular" panose="00000500000000000000" pitchFamily="50" charset="-127"/>
-              </a:rPr>
-              <a:t>월급 </a:t>
-            </a:r>
-            <a:r>
-              <a:rPr lang="en-US" altLang="ko-KR" sz="1050" dirty="0">
-                <a:latin typeface="나눔스퀘어 네오 OTF Regular" panose="00000500000000000000" pitchFamily="50" charset="-127"/>
-                <a:ea typeface="나눔스퀘어 네오 OTF Regular" panose="00000500000000000000" pitchFamily="50" charset="-127"/>
-              </a:rPr>
-              <a:t>20</a:t>
-            </a:r>
-            <a:r>
-              <a:rPr lang="ko-KR" altLang="en-US" sz="1050" dirty="0">
-                <a:latin typeface="나눔스퀘어 네오 OTF Regular" panose="00000500000000000000" pitchFamily="50" charset="-127"/>
-                <a:ea typeface="나눔스퀘어 네오 OTF Regular" panose="00000500000000000000" pitchFamily="50" charset="-127"/>
-              </a:rPr>
-              <a:t>만원 지급</a:t>
-            </a:r>
-            <a:endParaRPr lang="en-US" altLang="ko-KR" sz="1050" dirty="0">
-              <a:latin typeface="나눔스퀘어 네오 OTF Regular" panose="00000500000000000000" pitchFamily="50" charset="-127"/>
-              <a:ea typeface="나눔스퀘어 네오 OTF Regular" panose="00000500000000000000" pitchFamily="50" charset="-127"/>
-            </a:endParaRPr>
-          </a:p>
-        </p:txBody>
-      </p:sp>
-      <p:sp>
-        <p:nvSpPr>
-          <p:cNvPr id="22" name="TextBox 21">
-            <a:extLst>
-              <a:ext uri="{FF2B5EF4-FFF2-40B4-BE49-F238E27FC236}">
-                <a16:creationId xmlns:a16="http://schemas.microsoft.com/office/drawing/2014/main" id="{992C5781-A71B-4817-B728-C6730C39D9F6}"/>
-              </a:ext>
-            </a:extLst>
-          </p:cNvPr>
-          <p:cNvSpPr txBox="1">
-            <a:spLocks noChangeAspect="1"/>
-          </p:cNvSpPr>
-          <p:nvPr/>
-        </p:nvSpPr>
-        <p:spPr>
-          <a:xfrm>
-            <a:off x="1289308" y="5956496"/>
-            <a:ext cx="2994258" cy="275075"/>
-          </a:xfrm>
-          <a:prstGeom prst="rect">
-            <a:avLst/>
-          </a:prstGeom>
-          <a:noFill/>
-        </p:spPr>
-        <p:txBody>
-          <a:bodyPr wrap="square" rtlCol="0">
-            <a:spAutoFit/>
-          </a:bodyPr>
-          <a:lstStyle/>
-          <a:p>
-            <a:pPr marL="144000" lvl="1" indent="-144000" defTabSz="914400" latinLnBrk="1">
-              <a:lnSpc>
-                <a:spcPct val="120000"/>
-              </a:lnSpc>
-              <a:spcBef>
-                <a:spcPts val="500"/>
-              </a:spcBef>
-              <a:spcAft>
-                <a:spcPts val="300"/>
-              </a:spcAft>
-              <a:buFont typeface="Wingdings" panose="05000000000000000000" pitchFamily="2" charset="2"/>
-              <a:buChar char="§"/>
-              <a:defRPr/>
-            </a:pPr>
-            <a:r>
-              <a:rPr lang="ko-KR" altLang="en-US" sz="1050">
-                <a:latin typeface="나눔스퀘어 네오 OTF Regular" panose="00000500000000000000" pitchFamily="50" charset="-127"/>
-                <a:ea typeface="나눔스퀘어 네오 OTF Regular" panose="00000500000000000000" pitchFamily="50" charset="-127"/>
-              </a:rPr>
-              <a:t>부동산세금 납부 조건 </a:t>
-            </a:r>
-            <a:r>
-              <a:rPr lang="ko-KR" altLang="en-US" sz="1050" dirty="0" err="1">
-                <a:latin typeface="나눔스퀘어 네오 OTF Regular" panose="00000500000000000000" pitchFamily="50" charset="-127"/>
-                <a:ea typeface="나눔스퀘어 네오 OTF Regular" panose="00000500000000000000" pitchFamily="50" charset="-127"/>
-              </a:rPr>
-              <a:t>미충족</a:t>
-            </a:r>
-            <a:endParaRPr lang="en-US" altLang="ko-KR" sz="1050" dirty="0">
-              <a:latin typeface="나눔스퀘어 네오 OTF Regular" panose="00000500000000000000" pitchFamily="50" charset="-127"/>
-              <a:ea typeface="나눔스퀘어 네오 OTF Regular" panose="00000500000000000000" pitchFamily="50" charset="-127"/>
-            </a:endParaRPr>
-          </a:p>
-        </p:txBody>
-      </p:sp>
-      <p:sp>
-        <p:nvSpPr>
-          <p:cNvPr id="23" name="TextBox 22">
-            <a:extLst>
-              <a:ext uri="{FF2B5EF4-FFF2-40B4-BE49-F238E27FC236}">
-                <a16:creationId xmlns:a16="http://schemas.microsoft.com/office/drawing/2014/main" id="{8853FB07-900B-48A5-8A7B-1D7E94275B70}"/>
-              </a:ext>
-            </a:extLst>
-          </p:cNvPr>
-          <p:cNvSpPr txBox="1">
-            <a:spLocks noChangeAspect="1"/>
-          </p:cNvSpPr>
-          <p:nvPr/>
-        </p:nvSpPr>
-        <p:spPr>
-          <a:xfrm>
-            <a:off x="4860434" y="2795388"/>
-            <a:ext cx="2994258" cy="275075"/>
-          </a:xfrm>
-          <a:prstGeom prst="rect">
-            <a:avLst/>
-          </a:prstGeom>
-          <a:noFill/>
-        </p:spPr>
-        <p:txBody>
-          <a:bodyPr wrap="square" rtlCol="0">
-            <a:spAutoFit/>
-          </a:bodyPr>
-          <a:lstStyle/>
-          <a:p>
-            <a:pPr marL="144000" lvl="1" indent="-144000" defTabSz="914400" latinLnBrk="1">
-              <a:lnSpc>
-                <a:spcPct val="120000"/>
-              </a:lnSpc>
-              <a:spcBef>
-                <a:spcPts val="500"/>
-              </a:spcBef>
-              <a:spcAft>
-                <a:spcPts val="300"/>
-              </a:spcAft>
-              <a:buFont typeface="Wingdings" panose="05000000000000000000" pitchFamily="2" charset="2"/>
-              <a:buChar char="§"/>
-              <a:defRPr/>
-            </a:pPr>
-            <a:r>
-              <a:rPr lang="ko-KR" altLang="en-US" sz="1050" dirty="0">
-                <a:latin typeface="나눔스퀘어 네오 OTF Regular" panose="00000500000000000000" pitchFamily="50" charset="-127"/>
-                <a:ea typeface="나눔스퀘어 네오 OTF Regular" panose="00000500000000000000" pitchFamily="50" charset="-127"/>
-              </a:rPr>
-              <a:t>사회복지기금 납부</a:t>
-            </a:r>
-            <a:endParaRPr lang="en-US" altLang="ko-KR" sz="1050" dirty="0">
-              <a:latin typeface="나눔스퀘어 네오 OTF Regular" panose="00000500000000000000" pitchFamily="50" charset="-127"/>
-              <a:ea typeface="나눔스퀘어 네오 OTF Regular" panose="00000500000000000000" pitchFamily="50" charset="-127"/>
-            </a:endParaRPr>
-          </a:p>
-        </p:txBody>
-      </p:sp>
-      <p:sp>
-        <p:nvSpPr>
-          <p:cNvPr id="24" name="TextBox 23">
-            <a:extLst>
-              <a:ext uri="{FF2B5EF4-FFF2-40B4-BE49-F238E27FC236}">
-                <a16:creationId xmlns:a16="http://schemas.microsoft.com/office/drawing/2014/main" id="{20A3480C-CDFC-48F6-A88F-E3D3152BCB8D}"/>
-              </a:ext>
-            </a:extLst>
-          </p:cNvPr>
-          <p:cNvSpPr txBox="1">
-            <a:spLocks noChangeAspect="1"/>
-          </p:cNvSpPr>
-          <p:nvPr/>
-        </p:nvSpPr>
-        <p:spPr>
-          <a:xfrm>
-            <a:off x="4860434" y="6011178"/>
-            <a:ext cx="2994258" cy="275075"/>
-          </a:xfrm>
-          <a:prstGeom prst="rect">
-            <a:avLst/>
-          </a:prstGeom>
-          <a:noFill/>
-        </p:spPr>
-        <p:txBody>
-          <a:bodyPr wrap="square" rtlCol="0">
-            <a:spAutoFit/>
-          </a:bodyPr>
-          <a:lstStyle/>
-          <a:p>
-            <a:pPr marL="144000" lvl="1" indent="-144000" defTabSz="914400" latinLnBrk="1">
-              <a:lnSpc>
-                <a:spcPct val="120000"/>
-              </a:lnSpc>
-              <a:spcBef>
-                <a:spcPts val="500"/>
-              </a:spcBef>
-              <a:spcAft>
-                <a:spcPts val="300"/>
-              </a:spcAft>
-              <a:buFont typeface="Wingdings" panose="05000000000000000000" pitchFamily="2" charset="2"/>
-              <a:buChar char="§"/>
-              <a:defRPr/>
-            </a:pPr>
-            <a:r>
-              <a:rPr lang="ko-KR" altLang="en-US" sz="1050" dirty="0">
-                <a:latin typeface="나눔스퀘어 네오 OTF Regular" panose="00000500000000000000" pitchFamily="50" charset="-127"/>
-                <a:ea typeface="나눔스퀘어 네오 OTF Regular" panose="00000500000000000000" pitchFamily="50" charset="-127"/>
-              </a:rPr>
-              <a:t>기금 수령처에 </a:t>
-            </a:r>
-            <a:r>
-              <a:rPr lang="ko-KR" altLang="en-US" sz="1050" dirty="0" err="1">
-                <a:latin typeface="나눔스퀘어 네오 OTF Regular" panose="00000500000000000000" pitchFamily="50" charset="-127"/>
-                <a:ea typeface="나눔스퀘어 네오 OTF Regular" panose="00000500000000000000" pitchFamily="50" charset="-127"/>
-              </a:rPr>
-              <a:t>모여있는</a:t>
-            </a:r>
-            <a:r>
-              <a:rPr lang="ko-KR" altLang="en-US" sz="1050" dirty="0">
-                <a:latin typeface="나눔스퀘어 네오 OTF Regular" panose="00000500000000000000" pitchFamily="50" charset="-127"/>
-                <a:ea typeface="나눔스퀘어 네오 OTF Regular" panose="00000500000000000000" pitchFamily="50" charset="-127"/>
-              </a:rPr>
-              <a:t> 기금이 없을 경우</a:t>
-            </a:r>
-            <a:endParaRPr lang="en-US" altLang="ko-KR" sz="1050" dirty="0">
-              <a:latin typeface="나눔스퀘어 네오 OTF Regular" panose="00000500000000000000" pitchFamily="50" charset="-127"/>
-              <a:ea typeface="나눔스퀘어 네오 OTF Regular" panose="00000500000000000000" pitchFamily="50" charset="-127"/>
-            </a:endParaRPr>
-          </a:p>
-        </p:txBody>
-      </p:sp>
-      <p:sp>
-        <p:nvSpPr>
-          <p:cNvPr id="25" name="TextBox 24">
-            <a:extLst>
-              <a:ext uri="{FF2B5EF4-FFF2-40B4-BE49-F238E27FC236}">
-                <a16:creationId xmlns:a16="http://schemas.microsoft.com/office/drawing/2014/main" id="{5D6BBDE9-64CF-4414-878C-15B381FE9741}"/>
-              </a:ext>
-            </a:extLst>
-          </p:cNvPr>
-          <p:cNvSpPr txBox="1">
-            <a:spLocks noChangeAspect="1"/>
-          </p:cNvSpPr>
-          <p:nvPr/>
-        </p:nvSpPr>
-        <p:spPr>
-          <a:xfrm>
-            <a:off x="4860434" y="4403283"/>
-            <a:ext cx="2994258" cy="275075"/>
-          </a:xfrm>
-          <a:prstGeom prst="rect">
-            <a:avLst/>
-          </a:prstGeom>
-          <a:noFill/>
-        </p:spPr>
-        <p:txBody>
-          <a:bodyPr wrap="square" rtlCol="0">
-            <a:spAutoFit/>
-          </a:bodyPr>
-          <a:lstStyle/>
-          <a:p>
-            <a:pPr marL="144000" lvl="1" indent="-144000" defTabSz="914400" latinLnBrk="1">
-              <a:lnSpc>
-                <a:spcPct val="120000"/>
-              </a:lnSpc>
-              <a:spcBef>
-                <a:spcPts val="500"/>
-              </a:spcBef>
-              <a:spcAft>
-                <a:spcPts val="300"/>
-              </a:spcAft>
-              <a:buFont typeface="Wingdings" panose="05000000000000000000" pitchFamily="2" charset="2"/>
-              <a:buChar char="§"/>
-              <a:defRPr/>
-            </a:pPr>
-            <a:r>
-              <a:rPr lang="ko-KR" altLang="en-US" sz="1050" dirty="0">
-                <a:latin typeface="나눔스퀘어 네오 OTF Regular" panose="00000500000000000000" pitchFamily="50" charset="-127"/>
-                <a:ea typeface="나눔스퀘어 네오 OTF Regular" panose="00000500000000000000" pitchFamily="50" charset="-127"/>
-              </a:rPr>
-              <a:t>사회복지기금 수령</a:t>
-            </a:r>
-            <a:endParaRPr lang="en-US" altLang="ko-KR" sz="1050" dirty="0">
-              <a:latin typeface="나눔스퀘어 네오 OTF Regular" panose="00000500000000000000" pitchFamily="50" charset="-127"/>
-              <a:ea typeface="나눔스퀘어 네오 OTF Regular" panose="00000500000000000000" pitchFamily="50" charset="-127"/>
-            </a:endParaRPr>
-          </a:p>
-        </p:txBody>
-      </p:sp>
-    </p:spTree>
-    <p:extLst>
-      <p:ext uri="{BB962C8B-B14F-4D97-AF65-F5344CB8AC3E}">
-        <p14:creationId xmlns:p14="http://schemas.microsoft.com/office/powerpoint/2010/main" val="850160956"/>
+        <p14:creationId xmlns:p14="http://schemas.microsoft.com/office/powerpoint/2010/main" val="1149889887"/>
       </p:ext>
     </p:extLst>
   </p:cSld>
